--- a/docs/MemGate_Capstone_Review2_NMIMS.pptx
+++ b/docs/MemGate_Capstone_Review2_NMIMS.pptx
@@ -9142,7 +9142,7 @@
                 </a:solidFill>
                 <a:latin typeface="Times New Roman"/>
               </a:rPr>
-              <a:t>End-task accuracy — built, and honestly labelled</a:t>
+              <a:t>End-task accuracy — the gap survives a real reader</a:t>
             </a:r>
           </a:p>
         </p:txBody>
@@ -9220,7 +9220,7 @@
                 </a:solidFill>
                 <a:latin typeface="Times New Roman"/>
               </a:rPr>
-              <a:t>Every number so far is context recall: did the evidence reach the prompt? That is the ceiling on accuracy, not accuracy.</a:t>
+              <a:t>Every number so far is context recall: did the evidence reach the prompt? That is the ceiling on accuracy. This is the accuracy.</a:t>
             </a:r>
           </a:p>
         </p:txBody>
@@ -9355,7 +9355,7 @@
                           </a:solidFill>
                           <a:latin typeface="Times New Roman"/>
                         </a:rPr>
-                        <a:t>8.3%</a:t>
+                        <a:t>1.7%</a:t>
                       </a:r>
                     </a:p>
                   </a:txBody>
@@ -9374,7 +9374,7 @@
                           </a:solidFill>
                           <a:latin typeface="Times New Roman"/>
                         </a:rPr>
-                        <a:t>12.5</a:t>
+                        <a:t>5.0</a:t>
                       </a:r>
                     </a:p>
                   </a:txBody>
@@ -9451,7 +9451,7 @@
                           </a:solidFill>
                           <a:latin typeface="Times New Roman"/>
                         </a:rPr>
-                        <a:t>9.7</a:t>
+                        <a:t>11.9</a:t>
                       </a:r>
                     </a:p>
                   </a:txBody>
@@ -9470,7 +9470,7 @@
                           </a:solidFill>
                           <a:latin typeface="Times New Roman"/>
                         </a:rPr>
-                        <a:t>0.0%</a:t>
+                        <a:t>18.3%</a:t>
                       </a:r>
                     </a:p>
                   </a:txBody>
@@ -9509,7 +9509,7 @@
                           </a:solidFill>
                           <a:latin typeface="Times New Roman"/>
                         </a:rPr>
-                        <a:t>0.0%</a:t>
+                        <a:t>12.4%</a:t>
                       </a:r>
                     </a:p>
                   </a:txBody>
@@ -9528,7 +9528,7 @@
                           </a:solidFill>
                           <a:latin typeface="Times New Roman"/>
                         </a:rPr>
-                        <a:t>12.5</a:t>
+                        <a:t>17.7</a:t>
                       </a:r>
                     </a:p>
                   </a:txBody>
@@ -9547,7 +9547,7 @@
                           </a:solidFill>
                           <a:latin typeface="Times New Roman"/>
                         </a:rPr>
-                        <a:t>0.0%</a:t>
+                        <a:t>28.1%</a:t>
                       </a:r>
                     </a:p>
                   </a:txBody>
@@ -9586,7 +9586,7 @@
                           </a:solidFill>
                           <a:latin typeface="Times New Roman"/>
                         </a:rPr>
-                        <a:t>25.0%</a:t>
+                        <a:t>13.1%</a:t>
                       </a:r>
                     </a:p>
                   </a:txBody>
@@ -9605,7 +9605,7 @@
                           </a:solidFill>
                           <a:latin typeface="Times New Roman"/>
                         </a:rPr>
-                        <a:t>25.3</a:t>
+                        <a:t>19.9</a:t>
                       </a:r>
                     </a:p>
                   </a:txBody>
@@ -9624,7 +9624,7 @@
                           </a:solidFill>
                           <a:latin typeface="Times New Roman"/>
                         </a:rPr>
-                        <a:t>33.3%</a:t>
+                        <a:t>30.1%</a:t>
                       </a:r>
                     </a:p>
                   </a:txBody>
@@ -9662,7 +9662,7 @@
                           </a:solidFill>
                           <a:latin typeface="Times New Roman"/>
                         </a:rPr>
-                        <a:t>33.3%</a:t>
+                        <a:t>18.5%</a:t>
                       </a:r>
                     </a:p>
                   </a:txBody>
@@ -9680,7 +9680,7 @@
                           </a:solidFill>
                           <a:latin typeface="Times New Roman"/>
                         </a:rPr>
-                        <a:t>44.7</a:t>
+                        <a:t>24.7</a:t>
                       </a:r>
                     </a:p>
                   </a:txBody>
@@ -9698,7 +9698,7 @@
                           </a:solidFill>
                           <a:latin typeface="Times New Roman"/>
                         </a:rPr>
-                        <a:t>41.7%</a:t>
+                        <a:t>36.8%</a:t>
                       </a:r>
                     </a:p>
                   </a:txBody>
@@ -9737,7 +9737,7 @@
                           </a:solidFill>
                           <a:latin typeface="Times New Roman"/>
                         </a:rPr>
-                        <a:t>66.7%</a:t>
+                        <a:t>67.3%</a:t>
                       </a:r>
                     </a:p>
                   </a:txBody>
@@ -9756,7 +9756,7 @@
                           </a:solidFill>
                           <a:latin typeface="Times New Roman"/>
                         </a:rPr>
-                        <a:t>76.9</a:t>
+                        <a:t>75.7</a:t>
                       </a:r>
                     </a:p>
                   </a:txBody>
@@ -9992,7 +9992,7 @@
                 </a:solidFill>
                 <a:latin typeface="Times New Roman"/>
               </a:rPr>
-              <a:t>READ THIS BEFORE THE NUMBERS   </a:t>
+              <a:t>WHAT THE READER ACTUALLY ANSWERED   </a:t>
             </a:r>
             <a:r>
               <a:rPr sz="2300" b="1" i="0">
@@ -10001,7 +10001,7 @@
                 </a:solidFill>
                 <a:latin typeface="Times New Roman"/>
               </a:rPr>
-              <a:t>This is a 12-question smoke run, not a result.</a:t>
+              <a:t>+6.0 points of the +8.7 recall gap convert into correct answers</a:t>
             </a:r>
             <a:r>
               <a:rPr sz="2300" b="0" i="0">
@@ -10019,7 +10019,7 @@
                 </a:solidFill>
                 <a:latin typeface="Times New Roman"/>
               </a:rPr>
-              <a:t> It is shown because the pipeline, both controls and the generation cache work end to end — the remaining experiment is wired and ready. The full 715-question run is several hours of local generation and has not been made.</a:t>
+              <a:t> — 95% CI [+3.3, +9.1] clustered by conversation, which is 69% of the ceiling gap. All 715 answer-recoverable questions, one fixed reader. Closed-book scores 1.7%, so the margin above it is the memory system and almost nothing else.</a:t>
             </a:r>
           </a:p>
         </p:txBody>
@@ -12057,31 +12057,31 @@
                     <a:lstStyle/>
                     <a:p>
                       <a:r>
+                        <a:rPr sz="1900" b="1" i="0">
+                          <a:solidFill>
+                            <a:srgbClr val="C1272D"/>
+                          </a:solidFill>
+                          <a:latin typeface="Times New Roman"/>
+                        </a:rPr>
+                        <a:t>Complete</a:t>
+                      </a:r>
+                    </a:p>
+                  </a:txBody>
+                  <a:tcPr anchor="ctr" marL="128016" marR="91440" marT="27432" marB="27432"/>
+                </a:tc>
+                <a:tc>
+                  <a:txBody>
+                    <a:bodyPr/>
+                    <a:lstStyle/>
+                    <a:p>
+                      <a:r>
                         <a:rPr sz="1900" b="0" i="0">
                           <a:solidFill>
                             <a:srgbClr val="1A1A1A"/>
                           </a:solidFill>
                           <a:latin typeface="Times New Roman"/>
                         </a:rPr>
-                        <a:t>Pilot only</a:t>
-                      </a:r>
-                    </a:p>
-                  </a:txBody>
-                  <a:tcPr anchor="ctr" marL="128016" marR="91440" marT="27432" marB="27432"/>
-                </a:tc>
-                <a:tc>
-                  <a:txBody>
-                    <a:bodyPr/>
-                    <a:lstStyle/>
-                    <a:p>
-                      <a:r>
-                        <a:rPr sz="1900" b="0" i="0">
-                          <a:solidFill>
-                            <a:srgbClr val="1A1A1A"/>
-                          </a:solidFill>
-                          <a:latin typeface="Times New Roman"/>
-                        </a:rPr>
-                        <a:t>pipeline + cache built; 12-question run</a:t>
+                        <a:t>full 715-question run; results/endtask.csv</a:t>
                       </a:r>
                     </a:p>
                   </a:txBody>

--- a/docs/MemGate_Capstone_Review2_NMIMS.pptx
+++ b/docs/MemGate_Capstone_Review2_NMIMS.pptx
@@ -33,6 +33,8 @@
     <p:sldId id="281" r:id="rId32"/>
     <p:sldId id="282" r:id="rId33"/>
     <p:sldId id="283" r:id="rId34"/>
+    <p:sldId id="284" r:id="rId35"/>
+    <p:sldId id="285" r:id="rId36"/>
   </p:sldIdLst>
   <p:sldSz cx="18288000" cy="10287000" type="screen4x3"/>
   <p:notesSz cx="6858000" cy="9144000"/>
@@ -10071,6 +10073,2537 @@
                 </a:solidFill>
                 <a:latin typeface="Times New Roman"/>
               </a:rPr>
+              <a:t>We tested our own headline on a second benchmark — it failed</a:t>
+            </a:r>
+          </a:p>
+        </p:txBody>
+      </p:sp>
+      <p:sp>
+        <p:nvSpPr>
+          <p:cNvPr id="3" name="Rectangle 2"/>
+          <p:cNvSpPr/>
+          <p:nvPr/>
+        </p:nvSpPr>
+        <p:spPr>
+          <a:xfrm>
+            <a:off x="822960" y="1755648"/>
+            <a:ext cx="16642080" cy="19050"/>
+          </a:xfrm>
+          <a:prstGeom prst="rect">
+            <a:avLst/>
+          </a:prstGeom>
+          <a:solidFill>
+            <a:srgbClr val="C1272D"/>
+          </a:solidFill>
+          <a:ln>
+            <a:noFill/>
+          </a:ln>
+          <a:effectLst/>
+        </p:spPr>
+        <p:style>
+          <a:lnRef idx="1">
+            <a:schemeClr val="accent1"/>
+          </a:lnRef>
+          <a:fillRef idx="3">
+            <a:schemeClr val="accent1"/>
+          </a:fillRef>
+          <a:effectRef idx="2">
+            <a:schemeClr val="accent1"/>
+          </a:effectRef>
+          <a:fontRef idx="minor">
+            <a:schemeClr val="lt1"/>
+          </a:fontRef>
+        </p:style>
+        <p:txBody>
+          <a:bodyPr rtlCol="0" anchor="ctr"/>
+          <a:lstStyle/>
+          <a:p>
+            <a:pPr algn="ctr"/>
+          </a:p>
+        </p:txBody>
+      </p:sp>
+      <p:sp>
+        <p:nvSpPr>
+          <p:cNvPr id="4" name="TextBox 3"/>
+          <p:cNvSpPr txBox="1"/>
+          <p:nvPr/>
+        </p:nvSpPr>
+        <p:spPr>
+          <a:xfrm>
+            <a:off x="822960" y="1819656"/>
+            <a:ext cx="16642080" cy="548640"/>
+          </a:xfrm>
+          <a:prstGeom prst="rect">
+            <a:avLst/>
+          </a:prstGeom>
+          <a:noFill/>
+        </p:spPr>
+        <p:txBody>
+          <a:bodyPr wrap="square">
+            <a:spAutoFit/>
+          </a:bodyPr>
+          <a:lstStyle/>
+          <a:p>
+            <a:r>
+              <a:rPr sz="1900" b="0" i="1">
+                <a:solidFill>
+                  <a:srgbClr val="5A5A5A"/>
+                </a:solidFill>
+                <a:latin typeface="Times New Roman"/>
+              </a:rPr>
+              <a:t>LoCoMo is ten conversations. LongMemEval is 94 independent haystacks of 38–62 sessions each. The claim should survive the move. It does not.</a:t>
+            </a:r>
+          </a:p>
+        </p:txBody>
+      </p:sp>
+      <p:graphicFrame>
+        <p:nvGraphicFramePr>
+          <p:cNvPr id="5" name="Table 4"/>
+          <p:cNvGraphicFramePr>
+            <a:graphicFrameLocks noGrp="1"/>
+          </p:cNvGraphicFramePr>
+          <p:nvPr/>
+        </p:nvGraphicFramePr>
+        <p:xfrm>
+          <a:off x="822960" y="2514600"/>
+          <a:ext cx="15179037" cy="3291840"/>
+        </p:xfrm>
+        <a:graphic>
+          <a:graphicData uri="http://schemas.openxmlformats.org/drawingml/2006/table">
+            <a:tbl>
+              <a:tblPr firstRow="1" bandRow="1">
+                <a:tableStyleId>{5C22544A-7EE6-4342-B048-85BDC9FD1C3A}</a:tableStyleId>
+              </a:tblPr>
+              <a:tblGrid>
+                <a:gridCol w="2743199"/>
+                <a:gridCol w="2194560"/>
+                <a:gridCol w="2743199"/>
+                <a:gridCol w="2926079"/>
+                <a:gridCol w="4572000"/>
+              </a:tblGrid>
+              <a:tr h="658368">
+                <a:tc>
+                  <a:txBody>
+                    <a:bodyPr/>
+                    <a:lstStyle/>
+                    <a:p>
+                      <a:r>
+                        <a:rPr sz="1900" b="1" i="0">
+                          <a:solidFill>
+                            <a:srgbClr val="111111"/>
+                          </a:solidFill>
+                          <a:latin typeface="Times New Roman"/>
+                        </a:rPr>
+                        <a:t>Store budget</a:t>
+                      </a:r>
+                    </a:p>
+                  </a:txBody>
+                  <a:tcPr anchor="ctr" marL="128016" marR="91440" marT="27432" marB="27432"/>
+                </a:tc>
+                <a:tc>
+                  <a:txBody>
+                    <a:bodyPr/>
+                    <a:lstStyle/>
+                    <a:p>
+                      <a:r>
+                        <a:rPr sz="1900" b="1" i="0">
+                          <a:solidFill>
+                            <a:srgbClr val="111111"/>
+                          </a:solidFill>
+                          <a:latin typeface="Times New Roman"/>
+                        </a:rPr>
+                        <a:t>Retention</a:t>
+                      </a:r>
+                    </a:p>
+                  </a:txBody>
+                  <a:tcPr anchor="ctr" marL="128016" marR="91440" marT="27432" marB="27432"/>
+                </a:tc>
+                <a:tc>
+                  <a:txBody>
+                    <a:bodyPr/>
+                    <a:lstStyle/>
+                    <a:p>
+                      <a:r>
+                        <a:rPr sz="1900" b="1" i="0">
+                          <a:solidFill>
+                            <a:srgbClr val="111111"/>
+                          </a:solidFill>
+                          <a:latin typeface="Times New Roman"/>
+                        </a:rPr>
+                        <a:t>P1-S select</a:t>
+                      </a:r>
+                    </a:p>
+                  </a:txBody>
+                  <a:tcPr anchor="ctr" marL="128016" marR="91440" marT="27432" marB="27432"/>
+                </a:tc>
+                <a:tc>
+                  <a:txBody>
+                    <a:bodyPr/>
+                    <a:lstStyle/>
+                    <a:p>
+                      <a:r>
+                        <a:rPr sz="1900" b="1" i="0">
+                          <a:solidFill>
+                            <a:srgbClr val="111111"/>
+                          </a:solidFill>
+                          <a:latin typeface="Times New Roman"/>
+                        </a:rPr>
+                        <a:t>RAG store-all</a:t>
+                      </a:r>
+                    </a:p>
+                  </a:txBody>
+                  <a:tcPr anchor="ctr" marL="128016" marR="91440" marT="27432" marB="27432"/>
+                </a:tc>
+                <a:tc>
+                  <a:txBody>
+                    <a:bodyPr/>
+                    <a:lstStyle/>
+                    <a:p>
+                      <a:r>
+                        <a:rPr sz="1900" b="1" i="0">
+                          <a:solidFill>
+                            <a:srgbClr val="111111"/>
+                          </a:solidFill>
+                          <a:latin typeface="Times New Roman"/>
+                        </a:rPr>
+                        <a:t>Selection − FIFO</a:t>
+                      </a:r>
+                    </a:p>
+                  </a:txBody>
+                  <a:tcPr anchor="ctr" marL="128016" marR="91440" marT="27432" marB="27432"/>
+                </a:tc>
+              </a:tr>
+              <a:tr h="658368">
+                <a:tc>
+                  <a:txBody>
+                    <a:bodyPr/>
+                    <a:lstStyle/>
+                    <a:p>
+                      <a:r>
+                        <a:rPr sz="1900" b="0" i="0">
+                          <a:solidFill>
+                            <a:srgbClr val="1A1A1A"/>
+                          </a:solidFill>
+                          <a:latin typeface="Times New Roman"/>
+                        </a:rPr>
+                        <a:t>4,096</a:t>
+                      </a:r>
+                    </a:p>
+                  </a:txBody>
+                  <a:tcPr anchor="ctr" marL="128016" marR="91440" marT="27432" marB="27432"/>
+                </a:tc>
+                <a:tc>
+                  <a:txBody>
+                    <a:bodyPr/>
+                    <a:lstStyle/>
+                    <a:p>
+                      <a:pPr algn="r"/>
+                      <a:r>
+                        <a:rPr sz="1900" b="0" i="0">
+                          <a:solidFill>
+                            <a:srgbClr val="1A1A1A"/>
+                          </a:solidFill>
+                          <a:latin typeface="Times New Roman"/>
+                        </a:rPr>
+                        <a:t>3.9%</a:t>
+                      </a:r>
+                    </a:p>
+                  </a:txBody>
+                  <a:tcPr anchor="ctr" marL="128016" marR="91440" marT="27432" marB="27432"/>
+                </a:tc>
+                <a:tc>
+                  <a:txBody>
+                    <a:bodyPr/>
+                    <a:lstStyle/>
+                    <a:p>
+                      <a:pPr algn="r"/>
+                      <a:r>
+                        <a:rPr sz="1900" b="0" i="0">
+                          <a:solidFill>
+                            <a:srgbClr val="1A1A1A"/>
+                          </a:solidFill>
+                          <a:latin typeface="Times New Roman"/>
+                        </a:rPr>
+                        <a:t>14.5%</a:t>
+                      </a:r>
+                    </a:p>
+                  </a:txBody>
+                  <a:tcPr anchor="ctr" marL="128016" marR="91440" marT="27432" marB="27432"/>
+                </a:tc>
+                <a:tc>
+                  <a:txBody>
+                    <a:bodyPr/>
+                    <a:lstStyle/>
+                    <a:p>
+                      <a:pPr algn="r"/>
+                      <a:r>
+                        <a:rPr sz="1900" b="0" i="0">
+                          <a:solidFill>
+                            <a:srgbClr val="1A1A1A"/>
+                          </a:solidFill>
+                          <a:latin typeface="Times New Roman"/>
+                        </a:rPr>
+                        <a:t>9.7%</a:t>
+                      </a:r>
+                    </a:p>
+                  </a:txBody>
+                  <a:tcPr anchor="ctr" marL="128016" marR="91440" marT="27432" marB="27432"/>
+                </a:tc>
+                <a:tc>
+                  <a:txBody>
+                    <a:bodyPr/>
+                    <a:lstStyle/>
+                    <a:p>
+                      <a:pPr algn="r"/>
+                      <a:r>
+                        <a:rPr sz="1900" b="0" i="0">
+                          <a:solidFill>
+                            <a:srgbClr val="1A1A1A"/>
+                          </a:solidFill>
+                          <a:latin typeface="Times New Roman"/>
+                        </a:rPr>
+                        <a:t>+4.8  [-3.2, +12.9]</a:t>
+                      </a:r>
+                    </a:p>
+                  </a:txBody>
+                  <a:tcPr anchor="ctr" marL="128016" marR="91440" marT="27432" marB="27432"/>
+                </a:tc>
+              </a:tr>
+              <a:tr h="658368">
+                <a:tc>
+                  <a:txBody>
+                    <a:bodyPr/>
+                    <a:lstStyle/>
+                    <a:p>
+                      <a:r>
+                        <a:rPr sz="1900" b="0" i="0">
+                          <a:solidFill>
+                            <a:srgbClr val="1A1A1A"/>
+                          </a:solidFill>
+                          <a:latin typeface="Times New Roman"/>
+                        </a:rPr>
+                        <a:t>8,192</a:t>
+                      </a:r>
+                    </a:p>
+                  </a:txBody>
+                  <a:tcPr anchor="ctr" marL="128016" marR="91440" marT="27432" marB="27432"/>
+                </a:tc>
+                <a:tc>
+                  <a:txBody>
+                    <a:bodyPr/>
+                    <a:lstStyle/>
+                    <a:p>
+                      <a:pPr algn="r"/>
+                      <a:r>
+                        <a:rPr sz="1900" b="0" i="0">
+                          <a:solidFill>
+                            <a:srgbClr val="1A1A1A"/>
+                          </a:solidFill>
+                          <a:latin typeface="Times New Roman"/>
+                        </a:rPr>
+                        <a:t>7.9%</a:t>
+                      </a:r>
+                    </a:p>
+                  </a:txBody>
+                  <a:tcPr anchor="ctr" marL="128016" marR="91440" marT="27432" marB="27432"/>
+                </a:tc>
+                <a:tc>
+                  <a:txBody>
+                    <a:bodyPr/>
+                    <a:lstStyle/>
+                    <a:p>
+                      <a:pPr algn="r"/>
+                      <a:r>
+                        <a:rPr sz="1900" b="0" i="0">
+                          <a:solidFill>
+                            <a:srgbClr val="1A1A1A"/>
+                          </a:solidFill>
+                          <a:latin typeface="Times New Roman"/>
+                        </a:rPr>
+                        <a:t>22.6%</a:t>
+                      </a:r>
+                    </a:p>
+                  </a:txBody>
+                  <a:tcPr anchor="ctr" marL="128016" marR="91440" marT="27432" marB="27432"/>
+                </a:tc>
+                <a:tc>
+                  <a:txBody>
+                    <a:bodyPr/>
+                    <a:lstStyle/>
+                    <a:p>
+                      <a:pPr algn="r"/>
+                      <a:r>
+                        <a:rPr sz="1900" b="0" i="0">
+                          <a:solidFill>
+                            <a:srgbClr val="1A1A1A"/>
+                          </a:solidFill>
+                          <a:latin typeface="Times New Roman"/>
+                        </a:rPr>
+                        <a:t>14.5%</a:t>
+                      </a:r>
+                    </a:p>
+                  </a:txBody>
+                  <a:tcPr anchor="ctr" marL="128016" marR="91440" marT="27432" marB="27432"/>
+                </a:tc>
+                <a:tc>
+                  <a:txBody>
+                    <a:bodyPr/>
+                    <a:lstStyle/>
+                    <a:p>
+                      <a:pPr algn="r"/>
+                      <a:r>
+                        <a:rPr sz="1900" b="0" i="0">
+                          <a:solidFill>
+                            <a:srgbClr val="1A1A1A"/>
+                          </a:solidFill>
+                          <a:latin typeface="Times New Roman"/>
+                        </a:rPr>
+                        <a:t>+8.1  [-1.6, +17.7]</a:t>
+                      </a:r>
+                    </a:p>
+                  </a:txBody>
+                  <a:tcPr anchor="ctr" marL="128016" marR="91440" marT="27432" marB="27432"/>
+                </a:tc>
+              </a:tr>
+              <a:tr h="658368">
+                <a:tc>
+                  <a:txBody>
+                    <a:bodyPr/>
+                    <a:lstStyle/>
+                    <a:p>
+                      <a:r>
+                        <a:rPr sz="1900" b="0" i="0">
+                          <a:solidFill>
+                            <a:srgbClr val="1A1A1A"/>
+                          </a:solidFill>
+                          <a:latin typeface="Times New Roman"/>
+                        </a:rPr>
+                        <a:t>16,384</a:t>
+                      </a:r>
+                    </a:p>
+                  </a:txBody>
+                  <a:tcPr anchor="ctr" marL="128016" marR="91440" marT="27432" marB="27432"/>
+                </a:tc>
+                <a:tc>
+                  <a:txBody>
+                    <a:bodyPr/>
+                    <a:lstStyle/>
+                    <a:p>
+                      <a:pPr algn="r"/>
+                      <a:r>
+                        <a:rPr sz="1900" b="0" i="0">
+                          <a:solidFill>
+                            <a:srgbClr val="1A1A1A"/>
+                          </a:solidFill>
+                          <a:latin typeface="Times New Roman"/>
+                        </a:rPr>
+                        <a:t>15.7%</a:t>
+                      </a:r>
+                    </a:p>
+                  </a:txBody>
+                  <a:tcPr anchor="ctr" marL="128016" marR="91440" marT="27432" marB="27432"/>
+                </a:tc>
+                <a:tc>
+                  <a:txBody>
+                    <a:bodyPr/>
+                    <a:lstStyle/>
+                    <a:p>
+                      <a:pPr algn="r"/>
+                      <a:r>
+                        <a:rPr sz="1900" b="0" i="0">
+                          <a:solidFill>
+                            <a:srgbClr val="1A1A1A"/>
+                          </a:solidFill>
+                          <a:latin typeface="Times New Roman"/>
+                        </a:rPr>
+                        <a:t>21.0%</a:t>
+                      </a:r>
+                    </a:p>
+                  </a:txBody>
+                  <a:tcPr anchor="ctr" marL="128016" marR="91440" marT="27432" marB="27432"/>
+                </a:tc>
+                <a:tc>
+                  <a:txBody>
+                    <a:bodyPr/>
+                    <a:lstStyle/>
+                    <a:p>
+                      <a:pPr algn="r"/>
+                      <a:r>
+                        <a:rPr sz="1900" b="0" i="0">
+                          <a:solidFill>
+                            <a:srgbClr val="1A1A1A"/>
+                          </a:solidFill>
+                          <a:latin typeface="Times New Roman"/>
+                        </a:rPr>
+                        <a:t>27.4%</a:t>
+                      </a:r>
+                    </a:p>
+                  </a:txBody>
+                  <a:tcPr anchor="ctr" marL="128016" marR="91440" marT="27432" marB="27432"/>
+                </a:tc>
+                <a:tc>
+                  <a:txBody>
+                    <a:bodyPr/>
+                    <a:lstStyle/>
+                    <a:p>
+                      <a:pPr algn="r"/>
+                      <a:r>
+                        <a:rPr sz="1900" b="0" i="0">
+                          <a:solidFill>
+                            <a:srgbClr val="1A1A1A"/>
+                          </a:solidFill>
+                          <a:latin typeface="Times New Roman"/>
+                        </a:rPr>
+                        <a:t>-6.5  [-17.7, +4.8]</a:t>
+                      </a:r>
+                    </a:p>
+                  </a:txBody>
+                  <a:tcPr anchor="ctr" marL="128016" marR="91440" marT="27432" marB="27432"/>
+                </a:tc>
+              </a:tr>
+              <a:tr h="658368">
+                <a:tc>
+                  <a:txBody>
+                    <a:bodyPr/>
+                    <a:lstStyle/>
+                    <a:p>
+                      <a:r>
+                        <a:rPr sz="1900" b="1" i="0">
+                          <a:solidFill>
+                            <a:srgbClr val="C1272D"/>
+                          </a:solidFill>
+                          <a:latin typeface="Times New Roman"/>
+                        </a:rPr>
+                        <a:t>23,000</a:t>
+                      </a:r>
+                    </a:p>
+                  </a:txBody>
+                  <a:tcPr anchor="ctr" marL="128016" marR="91440" marT="27432" marB="27432"/>
+                </a:tc>
+                <a:tc>
+                  <a:txBody>
+                    <a:bodyPr/>
+                    <a:lstStyle/>
+                    <a:p>
+                      <a:r>
+                        <a:rPr sz="1900" b="1" i="0">
+                          <a:solidFill>
+                            <a:srgbClr val="C1272D"/>
+                          </a:solidFill>
+                          <a:latin typeface="Times New Roman"/>
+                        </a:rPr>
+                        <a:t>22.1%</a:t>
+                      </a:r>
+                    </a:p>
+                  </a:txBody>
+                  <a:tcPr anchor="ctr" marL="128016" marR="91440" marT="27432" marB="27432"/>
+                </a:tc>
+                <a:tc>
+                  <a:txBody>
+                    <a:bodyPr/>
+                    <a:lstStyle/>
+                    <a:p>
+                      <a:r>
+                        <a:rPr sz="1900" b="1" i="0">
+                          <a:solidFill>
+                            <a:srgbClr val="C1272D"/>
+                          </a:solidFill>
+                          <a:latin typeface="Times New Roman"/>
+                        </a:rPr>
+                        <a:t>19.4%</a:t>
+                      </a:r>
+                    </a:p>
+                  </a:txBody>
+                  <a:tcPr anchor="ctr" marL="128016" marR="91440" marT="27432" marB="27432"/>
+                </a:tc>
+                <a:tc>
+                  <a:txBody>
+                    <a:bodyPr/>
+                    <a:lstStyle/>
+                    <a:p>
+                      <a:r>
+                        <a:rPr sz="1900" b="1" i="0">
+                          <a:solidFill>
+                            <a:srgbClr val="C1272D"/>
+                          </a:solidFill>
+                          <a:latin typeface="Times New Roman"/>
+                        </a:rPr>
+                        <a:t>40.3%</a:t>
+                      </a:r>
+                    </a:p>
+                  </a:txBody>
+                  <a:tcPr anchor="ctr" marL="128016" marR="91440" marT="27432" marB="27432"/>
+                </a:tc>
+                <a:tc>
+                  <a:txBody>
+                    <a:bodyPr/>
+                    <a:lstStyle/>
+                    <a:p>
+                      <a:r>
+                        <a:rPr sz="1900" b="1" i="0">
+                          <a:solidFill>
+                            <a:srgbClr val="C1272D"/>
+                          </a:solidFill>
+                          <a:latin typeface="Times New Roman"/>
+                        </a:rPr>
+                        <a:t>-21.0  [-33.9, -8.1]</a:t>
+                      </a:r>
+                    </a:p>
+                  </a:txBody>
+                  <a:tcPr anchor="ctr" marL="128016" marR="91440" marT="27432" marB="27432"/>
+                </a:tc>
+              </a:tr>
+            </a:tbl>
+          </a:graphicData>
+        </a:graphic>
+      </p:graphicFrame>
+      <p:sp>
+        <p:nvSpPr>
+          <p:cNvPr id="6" name="TextBox 5"/>
+          <p:cNvSpPr txBox="1"/>
+          <p:nvPr/>
+        </p:nvSpPr>
+        <p:spPr>
+          <a:xfrm>
+            <a:off x="822960" y="6172200"/>
+            <a:ext cx="16642080" cy="936244"/>
+          </a:xfrm>
+          <a:prstGeom prst="rect">
+            <a:avLst/>
+          </a:prstGeom>
+          <a:noFill/>
+        </p:spPr>
+        <p:txBody>
+          <a:bodyPr wrap="square">
+            <a:spAutoFit/>
+          </a:bodyPr>
+          <a:lstStyle/>
+          <a:p>
+            <a:pPr>
+              <a:lnSpc>
+                <a:spcPct val="105000"/>
+              </a:lnSpc>
+              <a:spcAft>
+                <a:spcPts val="1000"/>
+              </a:spcAft>
+            </a:pPr>
+            <a:r>
+              <a:rPr sz="2100" b="0" i="0">
+                <a:solidFill>
+                  <a:srgbClr val="C1272D"/>
+                </a:solidFill>
+                <a:latin typeface="Times New Roman"/>
+              </a:rPr>
+              <a:t>•  </a:t>
+            </a:r>
+            <a:r>
+              <a:rPr sz="2100" b="1" i="0">
+                <a:solidFill>
+                  <a:srgbClr val="1A1A1A"/>
+                </a:solidFill>
+                <a:latin typeface="Times New Roman"/>
+              </a:rPr>
+              <a:t>At storage matched to LoCoMo's retention (22.1% vs 22.0%), selection loses to FIFO by 21 answer points </a:t>
+            </a:r>
+            <a:r>
+              <a:rPr sz="2100" b="0" i="0">
+                <a:solidFill>
+                  <a:srgbClr val="1A1A1A"/>
+                </a:solidFill>
+                <a:latin typeface="Times New Roman"/>
+              </a:rPr>
+              <a:t>— where LoCoMo gives +8.67. RAG scales as a cache must, 9.7% → 40.3%; P1-S peaks at 8,192 and then flattens.</a:t>
+            </a:r>
+          </a:p>
+        </p:txBody>
+      </p:sp>
+      <p:sp>
+        <p:nvSpPr>
+          <p:cNvPr id="7" name="Rectangle 6"/>
+          <p:cNvSpPr/>
+          <p:nvPr/>
+        </p:nvSpPr>
+        <p:spPr>
+          <a:xfrm>
+            <a:off x="822960" y="7360920"/>
+            <a:ext cx="64008" cy="1600200"/>
+          </a:xfrm>
+          <a:prstGeom prst="rect">
+            <a:avLst/>
+          </a:prstGeom>
+          <a:solidFill>
+            <a:srgbClr val="C1272D"/>
+          </a:solidFill>
+          <a:ln>
+            <a:noFill/>
+          </a:ln>
+          <a:effectLst/>
+        </p:spPr>
+        <p:style>
+          <a:lnRef idx="1">
+            <a:schemeClr val="accent1"/>
+          </a:lnRef>
+          <a:fillRef idx="3">
+            <a:schemeClr val="accent1"/>
+          </a:fillRef>
+          <a:effectRef idx="2">
+            <a:schemeClr val="accent1"/>
+          </a:effectRef>
+          <a:fontRef idx="minor">
+            <a:schemeClr val="lt1"/>
+          </a:fontRef>
+        </p:style>
+        <p:txBody>
+          <a:bodyPr rtlCol="0" anchor="ctr"/>
+          <a:lstStyle/>
+          <a:p>
+            <a:pPr algn="ctr"/>
+          </a:p>
+        </p:txBody>
+      </p:sp>
+      <p:sp>
+        <p:nvSpPr>
+          <p:cNvPr id="8" name="Rectangle 7"/>
+          <p:cNvSpPr/>
+          <p:nvPr/>
+        </p:nvSpPr>
+        <p:spPr>
+          <a:xfrm>
+            <a:off x="886968" y="7360920"/>
+            <a:ext cx="16578072" cy="1600200"/>
+          </a:xfrm>
+          <a:prstGeom prst="rect">
+            <a:avLst/>
+          </a:prstGeom>
+          <a:solidFill>
+            <a:srgbClr val="F2F2F0"/>
+          </a:solidFill>
+          <a:ln>
+            <a:noFill/>
+          </a:ln>
+          <a:effectLst/>
+        </p:spPr>
+        <p:style>
+          <a:lnRef idx="1">
+            <a:schemeClr val="accent1"/>
+          </a:lnRef>
+          <a:fillRef idx="3">
+            <a:schemeClr val="accent1"/>
+          </a:fillRef>
+          <a:effectRef idx="2">
+            <a:schemeClr val="accent1"/>
+          </a:effectRef>
+          <a:fontRef idx="minor">
+            <a:schemeClr val="lt1"/>
+          </a:fontRef>
+        </p:style>
+        <p:txBody>
+          <a:bodyPr rtlCol="0" anchor="ctr"/>
+          <a:lstStyle/>
+          <a:p>
+            <a:pPr algn="ctr"/>
+          </a:p>
+        </p:txBody>
+      </p:sp>
+      <p:sp>
+        <p:nvSpPr>
+          <p:cNvPr id="9" name="TextBox 8"/>
+          <p:cNvSpPr txBox="1"/>
+          <p:nvPr/>
+        </p:nvSpPr>
+        <p:spPr>
+          <a:xfrm>
+            <a:off x="1115568" y="7452360"/>
+            <a:ext cx="16002000" cy="1417320"/>
+          </a:xfrm>
+          <a:prstGeom prst="rect">
+            <a:avLst/>
+          </a:prstGeom>
+          <a:noFill/>
+        </p:spPr>
+        <p:txBody>
+          <a:bodyPr wrap="square" anchor="ctr">
+            <a:spAutoFit/>
+          </a:bodyPr>
+          <a:lstStyle/>
+          <a:p>
+            <a:pPr>
+              <a:lnSpc>
+                <a:spcPct val="105000"/>
+              </a:lnSpc>
+            </a:pPr>
+            <a:r>
+              <a:rPr sz="1700" b="1" i="0">
+                <a:solidFill>
+                  <a:srgbClr val="C1272D"/>
+                </a:solidFill>
+                <a:latin typeface="Times New Roman"/>
+              </a:rPr>
+              <a:t>WHY   </a:t>
+            </a:r>
+            <a:r>
+              <a:rPr sz="2300" b="1" i="0">
+                <a:solidFill>
+                  <a:srgbClr val="1A1A1A"/>
+                </a:solidFill>
+                <a:latin typeface="Times New Roman"/>
+              </a:rPr>
+              <a:t>The mechanism is not what failed. The scorer is.</a:t>
+            </a:r>
+            <a:r>
+              <a:rPr sz="2300" b="0" i="0">
+                <a:solidFill>
+                  <a:srgbClr val="1A1A1A"/>
+                </a:solidFill>
+                <a:latin typeface="Times New Roman"/>
+              </a:rPr>
+              <a:t/>
+            </a:r>
+            <a:r>
+              <a:rPr sz="2300" b="1" i="0">
+                <a:solidFill>
+                  <a:srgbClr val="1A1A1A"/>
+                </a:solidFill>
+                <a:latin typeface="Times New Roman"/>
+              </a:rPr>
+              <a:t>  HeuristicScorer's separation between evidence and non-evidence turns reverses sign between the corpora: +0.0476 on LoCoMo, −0.0346 on LongMemEval. Eviction orders on that utility, so on LongMemEval it discards evidence first — losing to no ranking at all.</a:t>
+            </a:r>
+          </a:p>
+        </p:txBody>
+      </p:sp>
+      <p:sp>
+        <p:nvSpPr>
+          <p:cNvPr id="10" name="TextBox 9"/>
+          <p:cNvSpPr txBox="1"/>
+          <p:nvPr/>
+        </p:nvSpPr>
+        <p:spPr>
+          <a:xfrm>
+            <a:off x="822960" y="9052560"/>
+            <a:ext cx="16642080" cy="726948"/>
+          </a:xfrm>
+          <a:prstGeom prst="rect">
+            <a:avLst/>
+          </a:prstGeom>
+          <a:noFill/>
+        </p:spPr>
+        <p:txBody>
+          <a:bodyPr wrap="square">
+            <a:spAutoFit/>
+          </a:bodyPr>
+          <a:lstStyle/>
+          <a:p>
+            <a:pPr algn="l"/>
+            <a:r>
+              <a:rPr sz="1800" b="0" i="1">
+                <a:solidFill>
+                  <a:srgbClr val="5A5A5A"/>
+                </a:solidFill>
+                <a:latin typeface="Times New Roman"/>
+              </a:rPr>
+              <a:t>Written for LoCoMo's 32-token dialogue lines, dense in regex-catchable cues; LongMemEval's turns are 210-token conversational prose. Consistent with §24.2, where the fitted scorer's strongest single feature is turn length — a corpus-level regularity, not a semantic one.   [results/longmemeval_S*.csv]</a:t>
+            </a:r>
+          </a:p>
+        </p:txBody>
+      </p:sp>
+    </p:spTree>
+  </p:cSld>
+  <p:clrMapOvr>
+    <a:masterClrMapping/>
+  </p:clrMapOvr>
+</p:sld>
+</file>
+
+<file path=ppt/slides/slide19.xml><?xml version="1.0" encoding="utf-8"?>
+<p:sld xmlns:a="http://schemas.openxmlformats.org/drawingml/2006/main" xmlns:p="http://schemas.openxmlformats.org/presentationml/2006/main" xmlns:r="http://schemas.openxmlformats.org/officeDocument/2006/relationships">
+  <p:cSld>
+    <p:spTree>
+      <p:nvGrpSpPr>
+        <p:cNvPr id="1" name=""/>
+        <p:cNvGrpSpPr/>
+        <p:nvPr/>
+      </p:nvGrpSpPr>
+      <p:grpSpPr/>
+      <p:sp>
+        <p:nvSpPr>
+          <p:cNvPr id="2" name="TextBox 1"/>
+          <p:cNvSpPr txBox="1"/>
+          <p:nvPr/>
+        </p:nvSpPr>
+        <p:spPr>
+          <a:xfrm>
+            <a:off x="822960" y="566928"/>
+            <a:ext cx="16642080" cy="1234440"/>
+          </a:xfrm>
+          <a:prstGeom prst="rect">
+            <a:avLst/>
+          </a:prstGeom>
+          <a:noFill/>
+        </p:spPr>
+        <p:txBody>
+          <a:bodyPr wrap="square">
+            <a:spAutoFit/>
+          </a:bodyPr>
+          <a:lstStyle/>
+          <a:p>
+            <a:r>
+              <a:rPr sz="4200" b="1" i="0">
+                <a:solidFill>
+                  <a:srgbClr val="111111"/>
+                </a:solidFill>
+                <a:latin typeface="Times New Roman"/>
+              </a:rPr>
+              <a:t>The obvious alternative explanation, ruled out</a:t>
+            </a:r>
+          </a:p>
+        </p:txBody>
+      </p:sp>
+      <p:sp>
+        <p:nvSpPr>
+          <p:cNvPr id="3" name="Rectangle 2"/>
+          <p:cNvSpPr/>
+          <p:nvPr/>
+        </p:nvSpPr>
+        <p:spPr>
+          <a:xfrm>
+            <a:off x="822960" y="1755648"/>
+            <a:ext cx="16642080" cy="19050"/>
+          </a:xfrm>
+          <a:prstGeom prst="rect">
+            <a:avLst/>
+          </a:prstGeom>
+          <a:solidFill>
+            <a:srgbClr val="C1272D"/>
+          </a:solidFill>
+          <a:ln>
+            <a:noFill/>
+          </a:ln>
+          <a:effectLst/>
+        </p:spPr>
+        <p:style>
+          <a:lnRef idx="1">
+            <a:schemeClr val="accent1"/>
+          </a:lnRef>
+          <a:fillRef idx="3">
+            <a:schemeClr val="accent1"/>
+          </a:fillRef>
+          <a:effectRef idx="2">
+            <a:schemeClr val="accent1"/>
+          </a:effectRef>
+          <a:fontRef idx="minor">
+            <a:schemeClr val="lt1"/>
+          </a:fontRef>
+        </p:style>
+        <p:txBody>
+          <a:bodyPr rtlCol="0" anchor="ctr"/>
+          <a:lstStyle/>
+          <a:p>
+            <a:pPr algn="ctr"/>
+          </a:p>
+        </p:txBody>
+      </p:sp>
+      <p:sp>
+        <p:nvSpPr>
+          <p:cNvPr id="4" name="TextBox 3"/>
+          <p:cNvSpPr txBox="1"/>
+          <p:nvPr/>
+        </p:nvSpPr>
+        <p:spPr>
+          <a:xfrm>
+            <a:off x="822960" y="1819656"/>
+            <a:ext cx="16642080" cy="548640"/>
+          </a:xfrm>
+          <a:prstGeom prst="rect">
+            <a:avLst/>
+          </a:prstGeom>
+          <a:noFill/>
+        </p:spPr>
+        <p:txBody>
+          <a:bodyPr wrap="square">
+            <a:spAutoFit/>
+          </a:bodyPr>
+          <a:lstStyle/>
+          <a:p>
+            <a:r>
+              <a:rPr sz="1900" b="0" i="1">
+                <a:solidFill>
+                  <a:srgbClr val="5A5A5A"/>
+                </a:solidFill>
+                <a:latin typeface="Times New Roman"/>
+              </a:rPr>
+              <a:t>Before accepting a result that contradicts our own headline, we tried to break it.</a:t>
+            </a:r>
+          </a:p>
+        </p:txBody>
+      </p:sp>
+      <p:sp>
+        <p:nvSpPr>
+          <p:cNvPr id="5" name="TextBox 4"/>
+          <p:cNvSpPr txBox="1"/>
+          <p:nvPr/>
+        </p:nvSpPr>
+        <p:spPr>
+          <a:xfrm>
+            <a:off x="822960" y="2514600"/>
+            <a:ext cx="16642080" cy="2071370"/>
+          </a:xfrm>
+          <a:prstGeom prst="rect">
+            <a:avLst/>
+          </a:prstGeom>
+          <a:noFill/>
+        </p:spPr>
+        <p:txBody>
+          <a:bodyPr wrap="square">
+            <a:spAutoFit/>
+          </a:bodyPr>
+          <a:lstStyle/>
+          <a:p>
+            <a:pPr>
+              <a:lnSpc>
+                <a:spcPct val="105000"/>
+              </a:lnSpc>
+              <a:spcAft>
+                <a:spcPts val="1000"/>
+              </a:spcAft>
+            </a:pPr>
+            <a:r>
+              <a:rPr sz="2100" b="0" i="0">
+                <a:solidFill>
+                  <a:srgbClr val="C1272D"/>
+                </a:solidFill>
+                <a:latin typeface="Times New Roman"/>
+              </a:rPr>
+              <a:t>•  </a:t>
+            </a:r>
+            <a:r>
+              <a:rPr sz="2100" b="1" i="0">
+                <a:solidFill>
+                  <a:srgbClr val="1A1A1A"/>
+                </a:solidFill>
+                <a:latin typeface="Times New Roman"/>
+              </a:rPr>
+              <a:t>The suspicion. </a:t>
+            </a:r>
+            <a:r>
+              <a:rPr sz="2100" b="0" i="0">
+                <a:solidFill>
+                  <a:srgbClr val="1A1A1A"/>
+                </a:solidFill>
+                <a:latin typeface="Times New Roman"/>
+              </a:rPr>
+              <a:t>MemGatePolicy reserves a fixed 25% of the context for recent turns before retrieval is consulted; RAGPolicy reserves nothing. So “P1-S vs RAG isolates which turns are forgotten” was not strictly true — they also differed in guaranteed recency share.</a:t>
+            </a:r>
+          </a:p>
+          <a:p>
+            <a:pPr>
+              <a:lnSpc>
+                <a:spcPct val="105000"/>
+              </a:lnSpc>
+              <a:spcAft>
+                <a:spcPts val="1000"/>
+              </a:spcAft>
+            </a:pPr>
+            <a:r>
+              <a:rPr sz="2100" b="0" i="0">
+                <a:solidFill>
+                  <a:srgbClr val="C1272D"/>
+                </a:solidFill>
+                <a:latin typeface="Times New Roman"/>
+              </a:rPr>
+              <a:t>•  </a:t>
+            </a:r>
+            <a:r>
+              <a:rPr sz="2100" b="1" i="0">
+                <a:solidFill>
+                  <a:srgbClr val="1A1A1A"/>
+                </a:solidFill>
+                <a:latin typeface="Times New Roman"/>
+              </a:rPr>
+              <a:t>Why it should have mattered here. </a:t>
+            </a:r>
+            <a:r>
+              <a:rPr sz="2100" b="0" i="0">
+                <a:solidFill>
+                  <a:srgbClr val="1A1A1A"/>
+                </a:solidFill>
+                <a:latin typeface="Times New Roman"/>
+              </a:rPr>
+              <a:t>That 512 tokens buys ~16 turns on LoCoMo but only 2–3 on LongMemEval, whose answer sits in one of 38–62 sessions chosen without regard to recency. P1-S was plausibly spending a quarter of its context on turns that cannot answer the question.</a:t>
+            </a:r>
+          </a:p>
+        </p:txBody>
+      </p:sp>
+      <p:graphicFrame>
+        <p:nvGraphicFramePr>
+          <p:cNvPr id="6" name="Table 5"/>
+          <p:cNvGraphicFramePr>
+            <a:graphicFrameLocks noGrp="1"/>
+          </p:cNvGraphicFramePr>
+          <p:nvPr/>
+        </p:nvGraphicFramePr>
+        <p:xfrm>
+          <a:off x="822960" y="5532120"/>
+          <a:ext cx="13350240" cy="2286000"/>
+        </p:xfrm>
+        <a:graphic>
+          <a:graphicData uri="http://schemas.openxmlformats.org/drawingml/2006/table">
+            <a:tbl>
+              <a:tblPr firstRow="1" bandRow="1">
+                <a:tableStyleId>{5C22544A-7EE6-4342-B048-85BDC9FD1C3A}</a:tableStyleId>
+              </a:tblPr>
+              <a:tblGrid>
+                <a:gridCol w="7680960"/>
+                <a:gridCol w="2560320"/>
+                <a:gridCol w="3108960"/>
+              </a:tblGrid>
+              <a:tr h="571500">
+                <a:tc>
+                  <a:txBody>
+                    <a:bodyPr/>
+                    <a:lstStyle/>
+                    <a:p>
+                      <a:r>
+                        <a:rPr sz="2000" b="1" i="0">
+                          <a:solidFill>
+                            <a:srgbClr val="111111"/>
+                          </a:solidFill>
+                          <a:latin typeface="Times New Roman"/>
+                        </a:rPr>
+                        <a:t>Arm at S=23,000</a:t>
+                      </a:r>
+                    </a:p>
+                  </a:txBody>
+                  <a:tcPr anchor="ctr" marL="128016" marR="91440" marT="27432" marB="27432"/>
+                </a:tc>
+                <a:tc>
+                  <a:txBody>
+                    <a:bodyPr/>
+                    <a:lstStyle/>
+                    <a:p>
+                      <a:r>
+                        <a:rPr sz="2000" b="1" i="0">
+                          <a:solidFill>
+                            <a:srgbClr val="111111"/>
+                          </a:solidFill>
+                          <a:latin typeface="Times New Roman"/>
+                        </a:rPr>
+                        <a:t>Strict</a:t>
+                      </a:r>
+                    </a:p>
+                  </a:txBody>
+                  <a:tcPr anchor="ctr" marL="128016" marR="91440" marT="27432" marB="27432"/>
+                </a:tc>
+                <a:tc>
+                  <a:txBody>
+                    <a:bodyPr/>
+                    <a:lstStyle/>
+                    <a:p>
+                      <a:r>
+                        <a:rPr sz="2000" b="1" i="0">
+                          <a:solidFill>
+                            <a:srgbClr val="111111"/>
+                          </a:solidFill>
+                          <a:latin typeface="Times New Roman"/>
+                        </a:rPr>
+                        <a:t>Answer recall</a:t>
+                      </a:r>
+                    </a:p>
+                  </a:txBody>
+                  <a:tcPr anchor="ctr" marL="128016" marR="91440" marT="27432" marB="27432"/>
+                </a:tc>
+              </a:tr>
+              <a:tr h="571500">
+                <a:tc>
+                  <a:txBody>
+                    <a:bodyPr/>
+                    <a:lstStyle/>
+                    <a:p>
+                      <a:r>
+                        <a:rPr sz="2000" b="0" i="0">
+                          <a:solidFill>
+                            <a:srgbClr val="1A1A1A"/>
+                          </a:solidFill>
+                          <a:latin typeface="Times New Roman"/>
+                        </a:rPr>
+                        <a:t>P1-S, split[0] = 0.25  (as measured)</a:t>
+                      </a:r>
+                    </a:p>
+                  </a:txBody>
+                  <a:tcPr anchor="ctr" marL="128016" marR="91440" marT="27432" marB="27432"/>
+                </a:tc>
+                <a:tc>
+                  <a:txBody>
+                    <a:bodyPr/>
+                    <a:lstStyle/>
+                    <a:p>
+                      <a:pPr algn="r"/>
+                      <a:r>
+                        <a:rPr sz="2000" b="0" i="0">
+                          <a:solidFill>
+                            <a:srgbClr val="1A1A1A"/>
+                          </a:solidFill>
+                          <a:latin typeface="Times New Roman"/>
+                        </a:rPr>
+                        <a:t>3.2%</a:t>
+                      </a:r>
+                    </a:p>
+                  </a:txBody>
+                  <a:tcPr anchor="ctr" marL="128016" marR="91440" marT="27432" marB="27432"/>
+                </a:tc>
+                <a:tc>
+                  <a:txBody>
+                    <a:bodyPr/>
+                    <a:lstStyle/>
+                    <a:p>
+                      <a:pPr algn="r"/>
+                      <a:r>
+                        <a:rPr sz="2000" b="0" i="0">
+                          <a:solidFill>
+                            <a:srgbClr val="1A1A1A"/>
+                          </a:solidFill>
+                          <a:latin typeface="Times New Roman"/>
+                        </a:rPr>
+                        <a:t>19.4%</a:t>
+                      </a:r>
+                    </a:p>
+                  </a:txBody>
+                  <a:tcPr anchor="ctr" marL="128016" marR="91440" marT="27432" marB="27432"/>
+                </a:tc>
+              </a:tr>
+              <a:tr h="571500">
+                <a:tc>
+                  <a:txBody>
+                    <a:bodyPr/>
+                    <a:lstStyle/>
+                    <a:p>
+                      <a:r>
+                        <a:rPr sz="2000" b="0" i="0">
+                          <a:solidFill>
+                            <a:srgbClr val="1A1A1A"/>
+                          </a:solidFill>
+                          <a:latin typeface="Times New Roman"/>
+                        </a:rPr>
+                        <a:t>P1-S, split[0] = 0     (reservation removed)</a:t>
+                      </a:r>
+                    </a:p>
+                  </a:txBody>
+                  <a:tcPr anchor="ctr" marL="128016" marR="91440" marT="27432" marB="27432"/>
+                </a:tc>
+                <a:tc>
+                  <a:txBody>
+                    <a:bodyPr/>
+                    <a:lstStyle/>
+                    <a:p>
+                      <a:pPr algn="r"/>
+                      <a:r>
+                        <a:rPr sz="2000" b="0" i="0">
+                          <a:solidFill>
+                            <a:srgbClr val="1A1A1A"/>
+                          </a:solidFill>
+                          <a:latin typeface="Times New Roman"/>
+                        </a:rPr>
+                        <a:t>2.1%</a:t>
+                      </a:r>
+                    </a:p>
+                  </a:txBody>
+                  <a:tcPr anchor="ctr" marL="128016" marR="91440" marT="27432" marB="27432"/>
+                </a:tc>
+                <a:tc>
+                  <a:txBody>
+                    <a:bodyPr/>
+                    <a:lstStyle/>
+                    <a:p>
+                      <a:pPr algn="r"/>
+                      <a:r>
+                        <a:rPr sz="2000" b="0" i="0">
+                          <a:solidFill>
+                            <a:srgbClr val="1A1A1A"/>
+                          </a:solidFill>
+                          <a:latin typeface="Times New Roman"/>
+                        </a:rPr>
+                        <a:t>19.4%</a:t>
+                      </a:r>
+                    </a:p>
+                  </a:txBody>
+                  <a:tcPr anchor="ctr" marL="128016" marR="91440" marT="27432" marB="27432"/>
+                </a:tc>
+              </a:tr>
+              <a:tr h="571500">
+                <a:tc>
+                  <a:txBody>
+                    <a:bodyPr/>
+                    <a:lstStyle/>
+                    <a:p>
+                      <a:r>
+                        <a:rPr sz="2000" b="0" i="0">
+                          <a:solidFill>
+                            <a:srgbClr val="1A1A1A"/>
+                          </a:solidFill>
+                          <a:latin typeface="Times New Roman"/>
+                        </a:rPr>
+                        <a:t>RAG store-all</a:t>
+                      </a:r>
+                    </a:p>
+                  </a:txBody>
+                  <a:tcPr anchor="ctr" marL="128016" marR="91440" marT="27432" marB="27432"/>
+                </a:tc>
+                <a:tc>
+                  <a:txBody>
+                    <a:bodyPr/>
+                    <a:lstStyle/>
+                    <a:p>
+                      <a:pPr algn="r"/>
+                      <a:r>
+                        <a:rPr sz="2000" b="0" i="0">
+                          <a:solidFill>
+                            <a:srgbClr val="1A1A1A"/>
+                          </a:solidFill>
+                          <a:latin typeface="Times New Roman"/>
+                        </a:rPr>
+                        <a:t>21.3%</a:t>
+                      </a:r>
+                    </a:p>
+                  </a:txBody>
+                  <a:tcPr anchor="ctr" marL="128016" marR="91440" marT="27432" marB="27432"/>
+                </a:tc>
+                <a:tc>
+                  <a:txBody>
+                    <a:bodyPr/>
+                    <a:lstStyle/>
+                    <a:p>
+                      <a:pPr algn="r"/>
+                      <a:r>
+                        <a:rPr sz="2000" b="0" i="0">
+                          <a:solidFill>
+                            <a:srgbClr val="1A1A1A"/>
+                          </a:solidFill>
+                          <a:latin typeface="Times New Roman"/>
+                        </a:rPr>
+                        <a:t>40.3%</a:t>
+                      </a:r>
+                    </a:p>
+                  </a:txBody>
+                  <a:tcPr anchor="ctr" marL="128016" marR="91440" marT="27432" marB="27432"/>
+                </a:tc>
+              </a:tr>
+            </a:tbl>
+          </a:graphicData>
+        </a:graphic>
+      </p:graphicFrame>
+      <p:sp>
+        <p:nvSpPr>
+          <p:cNvPr id="7" name="Rectangle 6"/>
+          <p:cNvSpPr/>
+          <p:nvPr/>
+        </p:nvSpPr>
+        <p:spPr>
+          <a:xfrm>
+            <a:off x="822960" y="8092440"/>
+            <a:ext cx="64008" cy="1554480"/>
+          </a:xfrm>
+          <a:prstGeom prst="rect">
+            <a:avLst/>
+          </a:prstGeom>
+          <a:solidFill>
+            <a:srgbClr val="C1272D"/>
+          </a:solidFill>
+          <a:ln>
+            <a:noFill/>
+          </a:ln>
+          <a:effectLst/>
+        </p:spPr>
+        <p:style>
+          <a:lnRef idx="1">
+            <a:schemeClr val="accent1"/>
+          </a:lnRef>
+          <a:fillRef idx="3">
+            <a:schemeClr val="accent1"/>
+          </a:fillRef>
+          <a:effectRef idx="2">
+            <a:schemeClr val="accent1"/>
+          </a:effectRef>
+          <a:fontRef idx="minor">
+            <a:schemeClr val="lt1"/>
+          </a:fontRef>
+        </p:style>
+        <p:txBody>
+          <a:bodyPr rtlCol="0" anchor="ctr"/>
+          <a:lstStyle/>
+          <a:p>
+            <a:pPr algn="ctr"/>
+          </a:p>
+        </p:txBody>
+      </p:sp>
+      <p:sp>
+        <p:nvSpPr>
+          <p:cNvPr id="8" name="Rectangle 7"/>
+          <p:cNvSpPr/>
+          <p:nvPr/>
+        </p:nvSpPr>
+        <p:spPr>
+          <a:xfrm>
+            <a:off x="886968" y="8092440"/>
+            <a:ext cx="16578072" cy="1554480"/>
+          </a:xfrm>
+          <a:prstGeom prst="rect">
+            <a:avLst/>
+          </a:prstGeom>
+          <a:solidFill>
+            <a:srgbClr val="F2F2F0"/>
+          </a:solidFill>
+          <a:ln>
+            <a:noFill/>
+          </a:ln>
+          <a:effectLst/>
+        </p:spPr>
+        <p:style>
+          <a:lnRef idx="1">
+            <a:schemeClr val="accent1"/>
+          </a:lnRef>
+          <a:fillRef idx="3">
+            <a:schemeClr val="accent1"/>
+          </a:fillRef>
+          <a:effectRef idx="2">
+            <a:schemeClr val="accent1"/>
+          </a:effectRef>
+          <a:fontRef idx="minor">
+            <a:schemeClr val="lt1"/>
+          </a:fontRef>
+        </p:style>
+        <p:txBody>
+          <a:bodyPr rtlCol="0" anchor="ctr"/>
+          <a:lstStyle/>
+          <a:p>
+            <a:pPr algn="ctr"/>
+          </a:p>
+        </p:txBody>
+      </p:sp>
+      <p:sp>
+        <p:nvSpPr>
+          <p:cNvPr id="9" name="TextBox 8"/>
+          <p:cNvSpPr txBox="1"/>
+          <p:nvPr/>
+        </p:nvSpPr>
+        <p:spPr>
+          <a:xfrm>
+            <a:off x="1115568" y="8183879"/>
+            <a:ext cx="16002000" cy="1371600"/>
+          </a:xfrm>
+          <a:prstGeom prst="rect">
+            <a:avLst/>
+          </a:prstGeom>
+          <a:noFill/>
+        </p:spPr>
+        <p:txBody>
+          <a:bodyPr wrap="square" anchor="ctr">
+            <a:spAutoFit/>
+          </a:bodyPr>
+          <a:lstStyle/>
+          <a:p>
+            <a:pPr>
+              <a:lnSpc>
+                <a:spcPct val="105000"/>
+              </a:lnSpc>
+            </a:pPr>
+            <a:r>
+              <a:rPr sz="1700" b="1" i="0">
+                <a:solidFill>
+                  <a:srgbClr val="C1272D"/>
+                </a:solidFill>
+                <a:latin typeface="Times New Roman"/>
+              </a:rPr>
+              <a:t>RESULT   </a:t>
+            </a:r>
+            <a:r>
+              <a:rPr sz="2300" b="1" i="0">
+                <a:solidFill>
+                  <a:srgbClr val="1A1A1A"/>
+                </a:solidFill>
+                <a:latin typeface="Times New Roman"/>
+              </a:rPr>
+              <a:t>Removing the reservation changed the answer metric by exactly nothing: +0.00, CI [+0.00, +0.00].</a:t>
+            </a:r>
+            <a:r>
+              <a:rPr sz="2300" b="0" i="0">
+                <a:solidFill>
+                  <a:srgbClr val="1A1A1A"/>
+                </a:solidFill>
+                <a:latin typeface="Times New Roman"/>
+              </a:rPr>
+              <a:t/>
+            </a:r>
+            <a:r>
+              <a:rPr sz="2300" b="1" i="0">
+                <a:solidFill>
+                  <a:srgbClr val="1A1A1A"/>
+                </a:solidFill>
+                <a:latin typeface="Times New Roman"/>
+              </a:rPr>
+              <a:t>  The confound is real but not load-bearing. Selection still loses by −20.97 either way, so the scorer-transfer failure is the whole story.</a:t>
+            </a:r>
+          </a:p>
+        </p:txBody>
+      </p:sp>
+      <p:sp>
+        <p:nvSpPr>
+          <p:cNvPr id="10" name="TextBox 9"/>
+          <p:cNvSpPr txBox="1"/>
+          <p:nvPr/>
+        </p:nvSpPr>
+        <p:spPr>
+          <a:xfrm>
+            <a:off x="822960" y="9235440"/>
+            <a:ext cx="16642080" cy="418338"/>
+          </a:xfrm>
+          <a:prstGeom prst="rect">
+            <a:avLst/>
+          </a:prstGeom>
+          <a:noFill/>
+        </p:spPr>
+        <p:txBody>
+          <a:bodyPr wrap="square">
+            <a:spAutoFit/>
+          </a:bodyPr>
+          <a:lstStyle/>
+          <a:p>
+            <a:pPr algn="l"/>
+            <a:r>
+              <a:rPr sz="1800" b="0" i="1">
+                <a:solidFill>
+                  <a:srgbClr val="5A5A5A"/>
+                </a:solidFill>
+                <a:latin typeface="Times New Roman"/>
+              </a:rPr>
+              <a:t>run_lme_split.py — same class, same scorer, same budgets, same retrieval depth; only split[0] moves.   [results/longmemeval_split_S23000.csv]</a:t>
+            </a:r>
+          </a:p>
+        </p:txBody>
+      </p:sp>
+    </p:spTree>
+  </p:cSld>
+  <p:clrMapOvr>
+    <a:masterClrMapping/>
+  </p:clrMapOvr>
+</p:sld>
+</file>
+
+<file path=ppt/slides/slide2.xml><?xml version="1.0" encoding="utf-8"?>
+<p:sld xmlns:a="http://schemas.openxmlformats.org/drawingml/2006/main" xmlns:p="http://schemas.openxmlformats.org/presentationml/2006/main" xmlns:r="http://schemas.openxmlformats.org/officeDocument/2006/relationships">
+  <p:cSld>
+    <p:spTree>
+      <p:nvGrpSpPr>
+        <p:cNvPr id="1" name=""/>
+        <p:cNvGrpSpPr/>
+        <p:nvPr/>
+      </p:nvGrpSpPr>
+      <p:grpSpPr/>
+      <p:sp>
+        <p:nvSpPr>
+          <p:cNvPr id="2" name="TextBox 1"/>
+          <p:cNvSpPr txBox="1"/>
+          <p:nvPr/>
+        </p:nvSpPr>
+        <p:spPr>
+          <a:xfrm>
+            <a:off x="822960" y="566928"/>
+            <a:ext cx="16642080" cy="1234440"/>
+          </a:xfrm>
+          <a:prstGeom prst="rect">
+            <a:avLst/>
+          </a:prstGeom>
+          <a:noFill/>
+        </p:spPr>
+        <p:txBody>
+          <a:bodyPr wrap="square">
+            <a:spAutoFit/>
+          </a:bodyPr>
+          <a:lstStyle/>
+          <a:p>
+            <a:r>
+              <a:rPr sz="4200" b="1" i="0">
+                <a:solidFill>
+                  <a:srgbClr val="111111"/>
+                </a:solidFill>
+                <a:latin typeface="Times New Roman"/>
+              </a:rPr>
+              <a:t>Where the project stands</a:t>
+            </a:r>
+          </a:p>
+        </p:txBody>
+      </p:sp>
+      <p:sp>
+        <p:nvSpPr>
+          <p:cNvPr id="3" name="Rectangle 2"/>
+          <p:cNvSpPr/>
+          <p:nvPr/>
+        </p:nvSpPr>
+        <p:spPr>
+          <a:xfrm>
+            <a:off x="822960" y="1755648"/>
+            <a:ext cx="16642080" cy="19050"/>
+          </a:xfrm>
+          <a:prstGeom prst="rect">
+            <a:avLst/>
+          </a:prstGeom>
+          <a:solidFill>
+            <a:srgbClr val="C1272D"/>
+          </a:solidFill>
+          <a:ln>
+            <a:noFill/>
+          </a:ln>
+          <a:effectLst/>
+        </p:spPr>
+        <p:style>
+          <a:lnRef idx="1">
+            <a:schemeClr val="accent1"/>
+          </a:lnRef>
+          <a:fillRef idx="3">
+            <a:schemeClr val="accent1"/>
+          </a:fillRef>
+          <a:effectRef idx="2">
+            <a:schemeClr val="accent1"/>
+          </a:effectRef>
+          <a:fontRef idx="minor">
+            <a:schemeClr val="lt1"/>
+          </a:fontRef>
+        </p:style>
+        <p:txBody>
+          <a:bodyPr rtlCol="0" anchor="ctr"/>
+          <a:lstStyle/>
+          <a:p>
+            <a:pPr algn="ctr"/>
+          </a:p>
+        </p:txBody>
+      </p:sp>
+      <p:sp>
+        <p:nvSpPr>
+          <p:cNvPr id="4" name="TextBox 3"/>
+          <p:cNvSpPr txBox="1"/>
+          <p:nvPr/>
+        </p:nvSpPr>
+        <p:spPr>
+          <a:xfrm>
+            <a:off x="822960" y="1819656"/>
+            <a:ext cx="16642080" cy="548640"/>
+          </a:xfrm>
+          <a:prstGeom prst="rect">
+            <a:avLst/>
+          </a:prstGeom>
+          <a:noFill/>
+        </p:spPr>
+        <p:txBody>
+          <a:bodyPr wrap="square">
+            <a:spAutoFit/>
+          </a:bodyPr>
+          <a:lstStyle/>
+          <a:p>
+            <a:r>
+              <a:rPr sz="1900" b="0" i="1">
+                <a:solidFill>
+                  <a:srgbClr val="5A5A5A"/>
+                </a:solidFill>
+                <a:latin typeface="Times New Roman"/>
+              </a:rPr>
+              <a:t>Eleven experiments run end to end; every claim carries a clustered confidence interval. The last of them put the headline itself to the test.</a:t>
+            </a:r>
+          </a:p>
+        </p:txBody>
+      </p:sp>
+      <p:graphicFrame>
+        <p:nvGraphicFramePr>
+          <p:cNvPr id="5" name="Table 4"/>
+          <p:cNvGraphicFramePr>
+            <a:graphicFrameLocks noGrp="1"/>
+          </p:cNvGraphicFramePr>
+          <p:nvPr/>
+        </p:nvGraphicFramePr>
+        <p:xfrm>
+          <a:off x="822960" y="2514600"/>
+          <a:ext cx="16642080" cy="5705856"/>
+        </p:xfrm>
+        <a:graphic>
+          <a:graphicData uri="http://schemas.openxmlformats.org/drawingml/2006/table">
+            <a:tbl>
+              <a:tblPr firstRow="1" bandRow="1">
+                <a:tableStyleId>{5C22544A-7EE6-4342-B048-85BDC9FD1C3A}</a:tableStyleId>
+              </a:tblPr>
+              <a:tblGrid>
+                <a:gridCol w="7315200"/>
+                <a:gridCol w="2194560"/>
+                <a:gridCol w="7132320"/>
+              </a:tblGrid>
+              <a:tr h="475488">
+                <a:tc>
+                  <a:txBody>
+                    <a:bodyPr/>
+                    <a:lstStyle/>
+                    <a:p>
+                      <a:r>
+                        <a:rPr sz="1800" b="1" i="0">
+                          <a:solidFill>
+                            <a:srgbClr val="111111"/>
+                          </a:solidFill>
+                          <a:latin typeface="Times New Roman"/>
+                        </a:rPr>
+                        <a:t>Workstream</a:t>
+                      </a:r>
+                    </a:p>
+                  </a:txBody>
+                  <a:tcPr anchor="ctr" marL="128016" marR="91440" marT="27432" marB="27432"/>
+                </a:tc>
+                <a:tc>
+                  <a:txBody>
+                    <a:bodyPr/>
+                    <a:lstStyle/>
+                    <a:p>
+                      <a:r>
+                        <a:rPr sz="1800" b="1" i="0">
+                          <a:solidFill>
+                            <a:srgbClr val="111111"/>
+                          </a:solidFill>
+                          <a:latin typeface="Times New Roman"/>
+                        </a:rPr>
+                        <a:t>State</a:t>
+                      </a:r>
+                    </a:p>
+                  </a:txBody>
+                  <a:tcPr anchor="ctr" marL="128016" marR="91440" marT="27432" marB="27432"/>
+                </a:tc>
+                <a:tc>
+                  <a:txBody>
+                    <a:bodyPr/>
+                    <a:lstStyle/>
+                    <a:p>
+                      <a:r>
+                        <a:rPr sz="1800" b="1" i="0">
+                          <a:solidFill>
+                            <a:srgbClr val="111111"/>
+                          </a:solidFill>
+                          <a:latin typeface="Times New Roman"/>
+                        </a:rPr>
+                        <a:t>Evidence</a:t>
+                      </a:r>
+                    </a:p>
+                  </a:txBody>
+                  <a:tcPr anchor="ctr" marL="128016" marR="91440" marT="27432" marB="27432"/>
+                </a:tc>
+              </a:tr>
+              <a:tr h="475488">
+                <a:tc>
+                  <a:txBody>
+                    <a:bodyPr/>
+                    <a:lstStyle/>
+                    <a:p>
+                      <a:r>
+                        <a:rPr sz="1800" b="0" i="0">
+                          <a:solidFill>
+                            <a:srgbClr val="1A1A1A"/>
+                          </a:solidFill>
+                          <a:latin typeface="Times New Roman"/>
+                        </a:rPr>
+                        <a:t>Harness, three-tier store, policies P0 / P1</a:t>
+                      </a:r>
+                    </a:p>
+                  </a:txBody>
+                  <a:tcPr anchor="ctr" marL="128016" marR="91440" marT="27432" marB="27432"/>
+                </a:tc>
+                <a:tc>
+                  <a:txBody>
+                    <a:bodyPr/>
+                    <a:lstStyle/>
+                    <a:p>
+                      <a:r>
+                        <a:rPr sz="1800" b="1" i="0">
+                          <a:solidFill>
+                            <a:srgbClr val="C1272D"/>
+                          </a:solidFill>
+                          <a:latin typeface="Times New Roman"/>
+                        </a:rPr>
+                        <a:t>Complete</a:t>
+                      </a:r>
+                    </a:p>
+                  </a:txBody>
+                  <a:tcPr anchor="ctr" marL="128016" marR="91440" marT="27432" marB="27432"/>
+                </a:tc>
+                <a:tc>
+                  <a:txBody>
+                    <a:bodyPr/>
+                    <a:lstStyle/>
+                    <a:p>
+                      <a:r>
+                        <a:rPr sz="1800" b="0" i="0">
+                          <a:solidFill>
+                            <a:srgbClr val="1A1A1A"/>
+                          </a:solidFill>
+                          <a:latin typeface="Times New Roman"/>
+                        </a:rPr>
+                        <a:t>memgate/ — ~6,500 lines of Python</a:t>
+                      </a:r>
+                    </a:p>
+                  </a:txBody>
+                  <a:tcPr anchor="ctr" marL="128016" marR="91440" marT="27432" marB="27432"/>
+                </a:tc>
+              </a:tr>
+              <a:tr h="475488">
+                <a:tc>
+                  <a:txBody>
+                    <a:bodyPr/>
+                    <a:lstStyle/>
+                    <a:p>
+                      <a:r>
+                        <a:rPr sz="1800" b="0" i="0">
+                          <a:solidFill>
+                            <a:srgbClr val="1A1A1A"/>
+                          </a:solidFill>
+                          <a:latin typeface="Times New Roman"/>
+                        </a:rPr>
+                        <a:t>LoCoMo wired; the evaluation leak removed</a:t>
+                      </a:r>
+                    </a:p>
+                  </a:txBody>
+                  <a:tcPr anchor="ctr" marL="128016" marR="91440" marT="27432" marB="27432"/>
+                </a:tc>
+                <a:tc>
+                  <a:txBody>
+                    <a:bodyPr/>
+                    <a:lstStyle/>
+                    <a:p>
+                      <a:r>
+                        <a:rPr sz="1800" b="1" i="0">
+                          <a:solidFill>
+                            <a:srgbClr val="C1272D"/>
+                          </a:solidFill>
+                          <a:latin typeface="Times New Roman"/>
+                        </a:rPr>
+                        <a:t>Complete</a:t>
+                      </a:r>
+                    </a:p>
+                  </a:txBody>
+                  <a:tcPr anchor="ctr" marL="128016" marR="91440" marT="27432" marB="27432"/>
+                </a:tc>
+                <a:tc>
+                  <a:txBody>
+                    <a:bodyPr/>
+                    <a:lstStyle/>
+                    <a:p>
+                      <a:pPr algn="r"/>
+                      <a:r>
+                        <a:rPr sz="1800" b="0" i="0">
+                          <a:solidFill>
+                            <a:srgbClr val="1A1A1A"/>
+                          </a:solidFill>
+                          <a:latin typeface="Times New Roman"/>
+                        </a:rPr>
+                        <a:t>3 label-blindness regression tests</a:t>
+                      </a:r>
+                    </a:p>
+                  </a:txBody>
+                  <a:tcPr anchor="ctr" marL="128016" marR="91440" marT="27432" marB="27432"/>
+                </a:tc>
+              </a:tr>
+              <a:tr h="475488">
+                <a:tc>
+                  <a:txBody>
+                    <a:bodyPr/>
+                    <a:lstStyle/>
+                    <a:p>
+                      <a:r>
+                        <a:rPr sz="1800" b="0" i="0">
+                          <a:solidFill>
+                            <a:srgbClr val="1A1A1A"/>
+                          </a:solidFill>
+                          <a:latin typeface="Times New Roman"/>
+                        </a:rPr>
+                        <a:t>Ablation study — 23 configurations</a:t>
+                      </a:r>
+                    </a:p>
+                  </a:txBody>
+                  <a:tcPr anchor="ctr" marL="128016" marR="91440" marT="27432" marB="27432"/>
+                </a:tc>
+                <a:tc>
+                  <a:txBody>
+                    <a:bodyPr/>
+                    <a:lstStyle/>
+                    <a:p>
+                      <a:r>
+                        <a:rPr sz="1800" b="1" i="0">
+                          <a:solidFill>
+                            <a:srgbClr val="C1272D"/>
+                          </a:solidFill>
+                          <a:latin typeface="Times New Roman"/>
+                        </a:rPr>
+                        <a:t>Complete</a:t>
+                      </a:r>
+                    </a:p>
+                  </a:txBody>
+                  <a:tcPr anchor="ctr" marL="128016" marR="91440" marT="27432" marB="27432"/>
+                </a:tc>
+                <a:tc>
+                  <a:txBody>
+                    <a:bodyPr/>
+                    <a:lstStyle/>
+                    <a:p>
+                      <a:r>
+                        <a:rPr sz="1800" b="0" i="0">
+                          <a:solidFill>
+                            <a:srgbClr val="1A1A1A"/>
+                          </a:solidFill>
+                          <a:latin typeface="Times New Roman"/>
+                        </a:rPr>
+                        <a:t>results/ablations_2048.csv</a:t>
+                      </a:r>
+                    </a:p>
+                  </a:txBody>
+                  <a:tcPr anchor="ctr" marL="128016" marR="91440" marT="27432" marB="27432"/>
+                </a:tc>
+              </a:tr>
+              <a:tr h="475488">
+                <a:tc>
+                  <a:txBody>
+                    <a:bodyPr/>
+                    <a:lstStyle/>
+                    <a:p>
+                      <a:r>
+                        <a:rPr sz="1800" b="0" i="0">
+                          <a:solidFill>
+                            <a:srgbClr val="1A1A1A"/>
+                          </a:solidFill>
+                          <a:latin typeface="Times New Roman"/>
+                        </a:rPr>
+                        <a:t>Storage budget — the corrected accounting</a:t>
+                      </a:r>
+                    </a:p>
+                  </a:txBody>
+                  <a:tcPr anchor="ctr" marL="128016" marR="91440" marT="27432" marB="27432"/>
+                </a:tc>
+                <a:tc>
+                  <a:txBody>
+                    <a:bodyPr/>
+                    <a:lstStyle/>
+                    <a:p>
+                      <a:r>
+                        <a:rPr sz="1800" b="1" i="0">
+                          <a:solidFill>
+                            <a:srgbClr val="C1272D"/>
+                          </a:solidFill>
+                          <a:latin typeface="Times New Roman"/>
+                        </a:rPr>
+                        <a:t>Complete</a:t>
+                      </a:r>
+                    </a:p>
+                  </a:txBody>
+                  <a:tcPr anchor="ctr" marL="128016" marR="91440" marT="27432" marB="27432"/>
+                </a:tc>
+                <a:tc>
+                  <a:txBody>
+                    <a:bodyPr/>
+                    <a:lstStyle/>
+                    <a:p>
+                      <a:pPr algn="r"/>
+                      <a:r>
+                        <a:rPr sz="1800" b="0" i="0">
+                          <a:solidFill>
+                            <a:srgbClr val="1A1A1A"/>
+                          </a:solidFill>
+                          <a:latin typeface="Times New Roman"/>
+                        </a:rPr>
+                        <a:t>35 configurations swept</a:t>
+                      </a:r>
+                    </a:p>
+                  </a:txBody>
+                  <a:tcPr anchor="ctr" marL="128016" marR="91440" marT="27432" marB="27432"/>
+                </a:tc>
+              </a:tr>
+              <a:tr h="475488">
+                <a:tc>
+                  <a:txBody>
+                    <a:bodyPr/>
+                    <a:lstStyle/>
+                    <a:p>
+                      <a:r>
+                        <a:rPr sz="1800" b="0" i="0">
+                          <a:solidFill>
+                            <a:srgbClr val="1A1A1A"/>
+                          </a:solidFill>
+                          <a:latin typeface="Times New Roman"/>
+                        </a:rPr>
+                        <a:t>Significance: bootstrap + exact McNemar</a:t>
+                      </a:r>
+                    </a:p>
+                  </a:txBody>
+                  <a:tcPr anchor="ctr" marL="128016" marR="91440" marT="27432" marB="27432"/>
+                </a:tc>
+                <a:tc>
+                  <a:txBody>
+                    <a:bodyPr/>
+                    <a:lstStyle/>
+                    <a:p>
+                      <a:r>
+                        <a:rPr sz="1800" b="1" i="0">
+                          <a:solidFill>
+                            <a:srgbClr val="C1272D"/>
+                          </a:solidFill>
+                          <a:latin typeface="Times New Roman"/>
+                        </a:rPr>
+                        <a:t>Complete</a:t>
+                      </a:r>
+                    </a:p>
+                  </a:txBody>
+                  <a:tcPr anchor="ctr" marL="128016" marR="91440" marT="27432" marB="27432"/>
+                </a:tc>
+                <a:tc>
+                  <a:txBody>
+                    <a:bodyPr/>
+                    <a:lstStyle/>
+                    <a:p>
+                      <a:r>
+                        <a:rPr sz="1800" b="0" i="0">
+                          <a:solidFill>
+                            <a:srgbClr val="1A1A1A"/>
+                          </a:solidFill>
+                          <a:latin typeface="Times New Roman"/>
+                        </a:rPr>
+                        <a:t>clustered by conversation, B = 10,000</a:t>
+                      </a:r>
+                    </a:p>
+                  </a:txBody>
+                  <a:tcPr anchor="ctr" marL="128016" marR="91440" marT="27432" marB="27432"/>
+                </a:tc>
+              </a:tr>
+              <a:tr h="475488">
+                <a:tc>
+                  <a:txBody>
+                    <a:bodyPr/>
+                    <a:lstStyle/>
+                    <a:p>
+                      <a:r>
+                        <a:rPr sz="1800" b="0" i="0">
+                          <a:solidFill>
+                            <a:srgbClr val="1A1A1A"/>
+                          </a:solidFill>
+                          <a:latin typeface="Times New Roman"/>
+                        </a:rPr>
+                        <a:t>Scaling to 182× · byte accounting · learned scorer</a:t>
+                      </a:r>
+                    </a:p>
+                  </a:txBody>
+                  <a:tcPr anchor="ctr" marL="128016" marR="91440" marT="27432" marB="27432"/>
+                </a:tc>
+                <a:tc>
+                  <a:txBody>
+                    <a:bodyPr/>
+                    <a:lstStyle/>
+                    <a:p>
+                      <a:r>
+                        <a:rPr sz="1800" b="1" i="0">
+                          <a:solidFill>
+                            <a:srgbClr val="C1272D"/>
+                          </a:solidFill>
+                          <a:latin typeface="Times New Roman"/>
+                        </a:rPr>
+                        <a:t>Complete</a:t>
+                      </a:r>
+                    </a:p>
+                  </a:txBody>
+                  <a:tcPr anchor="ctr" marL="128016" marR="91440" marT="27432" marB="27432"/>
+                </a:tc>
+                <a:tc>
+                  <a:txBody>
+                    <a:bodyPr/>
+                    <a:lstStyle/>
+                    <a:p>
+                      <a:r>
+                        <a:rPr sz="1800" b="0" i="0">
+                          <a:solidFill>
+                            <a:srgbClr val="1A1A1A"/>
+                          </a:solidFill>
+                          <a:latin typeface="Times New Roman"/>
+                        </a:rPr>
+                        <a:t>three separate sweeps</a:t>
+                      </a:r>
+                    </a:p>
+                  </a:txBody>
+                  <a:tcPr anchor="ctr" marL="128016" marR="91440" marT="27432" marB="27432"/>
+                </a:tc>
+              </a:tr>
+              <a:tr h="475488">
+                <a:tc>
+                  <a:txBody>
+                    <a:bodyPr/>
+                    <a:lstStyle/>
+                    <a:p>
+                      <a:r>
+                        <a:rPr sz="1800" b="0" i="0">
+                          <a:solidFill>
+                            <a:srgbClr val="1A1A1A"/>
+                          </a:solidFill>
+                          <a:latin typeface="Times New Roman"/>
+                        </a:rPr>
+                        <a:t>P2 LLM judge — built and evaluated</a:t>
+                      </a:r>
+                    </a:p>
+                  </a:txBody>
+                  <a:tcPr anchor="ctr" marL="128016" marR="91440" marT="27432" marB="27432"/>
+                </a:tc>
+                <a:tc>
+                  <a:txBody>
+                    <a:bodyPr/>
+                    <a:lstStyle/>
+                    <a:p>
+                      <a:r>
+                        <a:rPr sz="1800" b="1" i="0">
+                          <a:solidFill>
+                            <a:srgbClr val="C1272D"/>
+                          </a:solidFill>
+                          <a:latin typeface="Times New Roman"/>
+                        </a:rPr>
+                        <a:t>Complete</a:t>
+                      </a:r>
+                    </a:p>
+                  </a:txBody>
+                  <a:tcPr anchor="ctr" marL="128016" marR="91440" marT="27432" marB="27432"/>
+                </a:tc>
+                <a:tc>
+                  <a:txBody>
+                    <a:bodyPr/>
+                    <a:lstStyle/>
+                    <a:p>
+                      <a:r>
+                        <a:rPr sz="1800" b="0" i="0">
+                          <a:solidFill>
+                            <a:srgbClr val="1A1A1A"/>
+                          </a:solidFill>
+                          <a:latin typeface="Times New Roman"/>
+                        </a:rPr>
+                        <a:t>single-component swap, with CIs</a:t>
+                      </a:r>
+                    </a:p>
+                  </a:txBody>
+                  <a:tcPr anchor="ctr" marL="128016" marR="91440" marT="27432" marB="27432"/>
+                </a:tc>
+              </a:tr>
+              <a:tr h="475488">
+                <a:tc>
+                  <a:txBody>
+                    <a:bodyPr/>
+                    <a:lstStyle/>
+                    <a:p>
+                      <a:r>
+                        <a:rPr sz="1800" b="0" i="0">
+                          <a:solidFill>
+                            <a:srgbClr val="1A1A1A"/>
+                          </a:solidFill>
+                          <a:latin typeface="Times New Roman"/>
+                        </a:rPr>
+                        <a:t>End-task accuracy through a real reader</a:t>
+                      </a:r>
+                    </a:p>
+                  </a:txBody>
+                  <a:tcPr anchor="ctr" marL="128016" marR="91440" marT="27432" marB="27432"/>
+                </a:tc>
+                <a:tc>
+                  <a:txBody>
+                    <a:bodyPr/>
+                    <a:lstStyle/>
+                    <a:p>
+                      <a:r>
+                        <a:rPr sz="1800" b="1" i="0">
+                          <a:solidFill>
+                            <a:srgbClr val="C1272D"/>
+                          </a:solidFill>
+                          <a:latin typeface="Times New Roman"/>
+                        </a:rPr>
+                        <a:t>Complete</a:t>
+                      </a:r>
+                    </a:p>
+                  </a:txBody>
+                  <a:tcPr anchor="ctr" marL="128016" marR="91440" marT="27432" marB="27432"/>
+                </a:tc>
+                <a:tc>
+                  <a:txBody>
+                    <a:bodyPr/>
+                    <a:lstStyle/>
+                    <a:p>
+                      <a:r>
+                        <a:rPr sz="1800" b="0" i="0">
+                          <a:solidFill>
+                            <a:srgbClr val="1A1A1A"/>
+                          </a:solidFill>
+                          <a:latin typeface="Times New Roman"/>
+                        </a:rPr>
+                        <a:t>full 715-question run; results/endtask.csv</a:t>
+                      </a:r>
+                    </a:p>
+                  </a:txBody>
+                  <a:tcPr anchor="ctr" marL="128016" marR="91440" marT="27432" marB="27432"/>
+                </a:tc>
+              </a:tr>
+              <a:tr h="475488">
+                <a:tc>
+                  <a:txBody>
+                    <a:bodyPr/>
+                    <a:lstStyle/>
+                    <a:p>
+                      <a:r>
+                        <a:rPr sz="1800" b="0" i="0">
+                          <a:solidFill>
+                            <a:srgbClr val="1A1A1A"/>
+                          </a:solidFill>
+                          <a:latin typeface="Times New Roman"/>
+                        </a:rPr>
+                        <a:t>LongMemEval — the headline tested on a second benchmark</a:t>
+                      </a:r>
+                    </a:p>
+                  </a:txBody>
+                  <a:tcPr anchor="ctr" marL="128016" marR="91440" marT="27432" marB="27432"/>
+                </a:tc>
+                <a:tc>
+                  <a:txBody>
+                    <a:bodyPr/>
+                    <a:lstStyle/>
+                    <a:p>
+                      <a:r>
+                        <a:rPr sz="1800" b="1" i="0">
+                          <a:solidFill>
+                            <a:srgbClr val="C1272D"/>
+                          </a:solidFill>
+                          <a:latin typeface="Times New Roman"/>
+                        </a:rPr>
+                        <a:t>Complete</a:t>
+                      </a:r>
+                    </a:p>
+                  </a:txBody>
+                  <a:tcPr anchor="ctr" marL="128016" marR="91440" marT="27432" marB="27432"/>
+                </a:tc>
+                <a:tc>
+                  <a:txBody>
+                    <a:bodyPr/>
+                    <a:lstStyle/>
+                    <a:p>
+                      <a:pPr algn="r"/>
+                      <a:r>
+                        <a:rPr sz="1800" b="0" i="0">
+                          <a:solidFill>
+                            <a:srgbClr val="1A1A1A"/>
+                          </a:solidFill>
+                          <a:latin typeface="Times New Roman"/>
+                        </a:rPr>
+                        <a:t>94 haystacks; it does not replicate, and we know why</a:t>
+                      </a:r>
+                    </a:p>
+                  </a:txBody>
+                  <a:tcPr anchor="ctr" marL="128016" marR="91440" marT="27432" marB="27432"/>
+                </a:tc>
+              </a:tr>
+              <a:tr h="475488">
+                <a:tc>
+                  <a:txBody>
+                    <a:bodyPr/>
+                    <a:lstStyle/>
+                    <a:p>
+                      <a:r>
+                        <a:rPr sz="1800" b="0" i="0">
+                          <a:solidFill>
+                            <a:srgbClr val="1A1A1A"/>
+                          </a:solidFill>
+                          <a:latin typeface="Times New Roman"/>
+                        </a:rPr>
+                        <a:t>IEEE paper — compiled, cut to 6 pages</a:t>
+                      </a:r>
+                    </a:p>
+                  </a:txBody>
+                  <a:tcPr anchor="ctr" marL="128016" marR="91440" marT="27432" marB="27432"/>
+                </a:tc>
+                <a:tc>
+                  <a:txBody>
+                    <a:bodyPr/>
+                    <a:lstStyle/>
+                    <a:p>
+                      <a:r>
+                        <a:rPr sz="1800" b="1" i="0">
+                          <a:solidFill>
+                            <a:srgbClr val="C1272D"/>
+                          </a:solidFill>
+                          <a:latin typeface="Times New Roman"/>
+                        </a:rPr>
+                        <a:t>Complete</a:t>
+                      </a:r>
+                    </a:p>
+                  </a:txBody>
+                  <a:tcPr anchor="ctr" marL="128016" marR="91440" marT="27432" marB="27432"/>
+                </a:tc>
+                <a:tc>
+                  <a:txBody>
+                    <a:bodyPr/>
+                    <a:lstStyle/>
+                    <a:p>
+                      <a:r>
+                        <a:rPr sz="1800" b="0" i="0">
+                          <a:solidFill>
+                            <a:srgbClr val="1A1A1A"/>
+                          </a:solidFill>
+                          <a:latin typeface="Times New Roman"/>
+                        </a:rPr>
+                        <a:t>paper/main.pdf, 19/19 citations</a:t>
+                      </a:r>
+                    </a:p>
+                  </a:txBody>
+                  <a:tcPr anchor="ctr" marL="128016" marR="91440" marT="27432" marB="27432"/>
+                </a:tc>
+              </a:tr>
+              <a:tr h="475488">
+                <a:tc>
+                  <a:txBody>
+                    <a:bodyPr/>
+                    <a:lstStyle/>
+                    <a:p>
+                      <a:r>
+                        <a:rPr sz="1800" b="0" i="0">
+                          <a:solidFill>
+                            <a:srgbClr val="1A1A1A"/>
+                          </a:solidFill>
+                          <a:latin typeface="Times New Roman"/>
+                        </a:rPr>
+                        <a:t>Abstractive compression · online learning</a:t>
+                      </a:r>
+                    </a:p>
+                  </a:txBody>
+                  <a:tcPr anchor="ctr" marL="128016" marR="91440" marT="27432" marB="27432"/>
+                </a:tc>
+                <a:tc>
+                  <a:txBody>
+                    <a:bodyPr/>
+                    <a:lstStyle/>
+                    <a:p>
+                      <a:r>
+                        <a:rPr sz="1800" b="0" i="0">
+                          <a:solidFill>
+                            <a:srgbClr val="1A1A1A"/>
+                          </a:solidFill>
+                          <a:latin typeface="Times New Roman"/>
+                        </a:rPr>
+                        <a:t>Pilot only</a:t>
+                      </a:r>
+                    </a:p>
+                  </a:txBody>
+                  <a:tcPr anchor="ctr" marL="128016" marR="91440" marT="27432" marB="27432"/>
+                </a:tc>
+                <a:tc>
+                  <a:txBody>
+                    <a:bodyPr/>
+                    <a:lstStyle/>
+                    <a:p>
+                      <a:pPr algn="r"/>
+                      <a:r>
+                        <a:rPr sz="1800" b="0" i="0">
+                          <a:solidFill>
+                            <a:srgbClr val="1A1A1A"/>
+                          </a:solidFill>
+                          <a:latin typeface="Times New Roman"/>
+                        </a:rPr>
+                        <a:t>1 and 2 conversations — intervals not yet quotable</a:t>
+                      </a:r>
+                    </a:p>
+                  </a:txBody>
+                  <a:tcPr anchor="ctr" marL="128016" marR="91440" marT="27432" marB="27432"/>
+                </a:tc>
+              </a:tr>
+            </a:tbl>
+          </a:graphicData>
+        </a:graphic>
+      </p:graphicFrame>
+      <p:sp>
+        <p:nvSpPr>
+          <p:cNvPr id="6" name="Rectangle 5"/>
+          <p:cNvSpPr/>
+          <p:nvPr/>
+        </p:nvSpPr>
+        <p:spPr>
+          <a:xfrm>
+            <a:off x="822960" y="8503920"/>
+            <a:ext cx="64008" cy="1234440"/>
+          </a:xfrm>
+          <a:prstGeom prst="rect">
+            <a:avLst/>
+          </a:prstGeom>
+          <a:solidFill>
+            <a:srgbClr val="C1272D"/>
+          </a:solidFill>
+          <a:ln>
+            <a:noFill/>
+          </a:ln>
+          <a:effectLst/>
+        </p:spPr>
+        <p:style>
+          <a:lnRef idx="1">
+            <a:schemeClr val="accent1"/>
+          </a:lnRef>
+          <a:fillRef idx="3">
+            <a:schemeClr val="accent1"/>
+          </a:fillRef>
+          <a:effectRef idx="2">
+            <a:schemeClr val="accent1"/>
+          </a:effectRef>
+          <a:fontRef idx="minor">
+            <a:schemeClr val="lt1"/>
+          </a:fontRef>
+        </p:style>
+        <p:txBody>
+          <a:bodyPr rtlCol="0" anchor="ctr"/>
+          <a:lstStyle/>
+          <a:p>
+            <a:pPr algn="ctr"/>
+          </a:p>
+        </p:txBody>
+      </p:sp>
+      <p:sp>
+        <p:nvSpPr>
+          <p:cNvPr id="7" name="Rectangle 6"/>
+          <p:cNvSpPr/>
+          <p:nvPr/>
+        </p:nvSpPr>
+        <p:spPr>
+          <a:xfrm>
+            <a:off x="886968" y="8503920"/>
+            <a:ext cx="16578072" cy="1234440"/>
+          </a:xfrm>
+          <a:prstGeom prst="rect">
+            <a:avLst/>
+          </a:prstGeom>
+          <a:solidFill>
+            <a:srgbClr val="F2F2F0"/>
+          </a:solidFill>
+          <a:ln>
+            <a:noFill/>
+          </a:ln>
+          <a:effectLst/>
+        </p:spPr>
+        <p:style>
+          <a:lnRef idx="1">
+            <a:schemeClr val="accent1"/>
+          </a:lnRef>
+          <a:fillRef idx="3">
+            <a:schemeClr val="accent1"/>
+          </a:fillRef>
+          <a:effectRef idx="2">
+            <a:schemeClr val="accent1"/>
+          </a:effectRef>
+          <a:fontRef idx="minor">
+            <a:schemeClr val="lt1"/>
+          </a:fontRef>
+        </p:style>
+        <p:txBody>
+          <a:bodyPr rtlCol="0" anchor="ctr"/>
+          <a:lstStyle/>
+          <a:p>
+            <a:pPr algn="ctr"/>
+          </a:p>
+        </p:txBody>
+      </p:sp>
+      <p:sp>
+        <p:nvSpPr>
+          <p:cNvPr id="8" name="TextBox 7"/>
+          <p:cNvSpPr txBox="1"/>
+          <p:nvPr/>
+        </p:nvSpPr>
+        <p:spPr>
+          <a:xfrm>
+            <a:off x="1115568" y="8595360"/>
+            <a:ext cx="16002000" cy="1051560"/>
+          </a:xfrm>
+          <a:prstGeom prst="rect">
+            <a:avLst/>
+          </a:prstGeom>
+          <a:noFill/>
+        </p:spPr>
+        <p:txBody>
+          <a:bodyPr wrap="square" anchor="ctr">
+            <a:spAutoFit/>
+          </a:bodyPr>
+          <a:lstStyle/>
+          <a:p>
+            <a:pPr>
+              <a:lnSpc>
+                <a:spcPct val="105000"/>
+              </a:lnSpc>
+            </a:pPr>
+            <a:r>
+              <a:rPr sz="2300" b="0" i="0">
+                <a:solidFill>
+                  <a:srgbClr val="1A1A1A"/>
+                </a:solidFill>
+                <a:latin typeface="Times New Roman"/>
+              </a:rPr>
+              <a:t>The headline:  </a:t>
+            </a:r>
+            <a:r>
+              <a:rPr sz="2300" b="1" i="0">
+                <a:solidFill>
+                  <a:srgbClr val="1A1A1A"/>
+                </a:solidFill>
+                <a:latin typeface="Times New Roman"/>
+              </a:rPr>
+              <a:t>+8.7 answer-recall points</a:t>
+            </a:r>
+            <a:r>
+              <a:rPr sz="2300" b="0" i="0">
+                <a:solidFill>
+                  <a:srgbClr val="1A1A1A"/>
+                </a:solidFill>
+                <a:latin typeface="Times New Roman"/>
+              </a:rPr>
+              <a:t> for choosing which turns to forget, over forgetting oldest-first — at identical storage, fidelity and retrieval. On a second benchmark it does not hold, and the cause is the scorer rather than the mechanism (slides 18–19).</a:t>
+            </a:r>
+          </a:p>
+        </p:txBody>
+      </p:sp>
+    </p:spTree>
+  </p:cSld>
+  <p:clrMapOvr>
+    <a:masterClrMapping/>
+  </p:clrMapOvr>
+</p:sld>
+</file>
+
+<file path=ppt/slides/slide20.xml><?xml version="1.0" encoding="utf-8"?>
+<p:sld xmlns:a="http://schemas.openxmlformats.org/drawingml/2006/main" xmlns:p="http://schemas.openxmlformats.org/presentationml/2006/main" xmlns:r="http://schemas.openxmlformats.org/officeDocument/2006/relationships">
+  <p:cSld>
+    <p:spTree>
+      <p:nvGrpSpPr>
+        <p:cNvPr id="1" name=""/>
+        <p:cNvGrpSpPr/>
+        <p:nvPr/>
+      </p:nvGrpSpPr>
+      <p:grpSpPr/>
+      <p:sp>
+        <p:nvSpPr>
+          <p:cNvPr id="2" name="TextBox 1"/>
+          <p:cNvSpPr txBox="1"/>
+          <p:nvPr/>
+        </p:nvSpPr>
+        <p:spPr>
+          <a:xfrm>
+            <a:off x="822960" y="566928"/>
+            <a:ext cx="16642080" cy="1234440"/>
+          </a:xfrm>
+          <a:prstGeom prst="rect">
+            <a:avLst/>
+          </a:prstGeom>
+          <a:noFill/>
+        </p:spPr>
+        <p:txBody>
+          <a:bodyPr wrap="square">
+            <a:spAutoFit/>
+          </a:bodyPr>
+          <a:lstStyle/>
+          <a:p>
+            <a:r>
+              <a:rPr sz="4200" b="1" i="0">
+                <a:solidFill>
+                  <a:srgbClr val="111111"/>
+                </a:solidFill>
+                <a:latin typeface="Times New Roman"/>
+              </a:rPr>
               <a:t>Three findings about measurement</a:t>
             </a:r>
           </a:p>
@@ -10550,7 +13083,7 @@
 </p:sld>
 </file>
 
-<file path=ppt/slides/slide19.xml><?xml version="1.0" encoding="utf-8"?>
+<file path=ppt/slides/slide21.xml><?xml version="1.0" encoding="utf-8"?>
 <p:sld xmlns:a="http://schemas.openxmlformats.org/drawingml/2006/main" xmlns:p="http://schemas.openxmlformats.org/presentationml/2006/main" xmlns:r="http://schemas.openxmlformats.org/officeDocument/2006/relationships">
   <p:cSld>
     <p:spTree>
@@ -11437,871 +13970,7 @@
 </p:sld>
 </file>
 
-<file path=ppt/slides/slide2.xml><?xml version="1.0" encoding="utf-8"?>
-<p:sld xmlns:a="http://schemas.openxmlformats.org/drawingml/2006/main" xmlns:p="http://schemas.openxmlformats.org/presentationml/2006/main" xmlns:r="http://schemas.openxmlformats.org/officeDocument/2006/relationships">
-  <p:cSld>
-    <p:spTree>
-      <p:nvGrpSpPr>
-        <p:cNvPr id="1" name=""/>
-        <p:cNvGrpSpPr/>
-        <p:nvPr/>
-      </p:nvGrpSpPr>
-      <p:grpSpPr/>
-      <p:sp>
-        <p:nvSpPr>
-          <p:cNvPr id="2" name="TextBox 1"/>
-          <p:cNvSpPr txBox="1"/>
-          <p:nvPr/>
-        </p:nvSpPr>
-        <p:spPr>
-          <a:xfrm>
-            <a:off x="822960" y="566928"/>
-            <a:ext cx="16642080" cy="1234440"/>
-          </a:xfrm>
-          <a:prstGeom prst="rect">
-            <a:avLst/>
-          </a:prstGeom>
-          <a:noFill/>
-        </p:spPr>
-        <p:txBody>
-          <a:bodyPr wrap="square">
-            <a:spAutoFit/>
-          </a:bodyPr>
-          <a:lstStyle/>
-          <a:p>
-            <a:r>
-              <a:rPr sz="4200" b="1" i="0">
-                <a:solidFill>
-                  <a:srgbClr val="111111"/>
-                </a:solidFill>
-                <a:latin typeface="Times New Roman"/>
-              </a:rPr>
-              <a:t>Where the project stands</a:t>
-            </a:r>
-          </a:p>
-        </p:txBody>
-      </p:sp>
-      <p:sp>
-        <p:nvSpPr>
-          <p:cNvPr id="3" name="Rectangle 2"/>
-          <p:cNvSpPr/>
-          <p:nvPr/>
-        </p:nvSpPr>
-        <p:spPr>
-          <a:xfrm>
-            <a:off x="822960" y="1755648"/>
-            <a:ext cx="16642080" cy="19050"/>
-          </a:xfrm>
-          <a:prstGeom prst="rect">
-            <a:avLst/>
-          </a:prstGeom>
-          <a:solidFill>
-            <a:srgbClr val="C1272D"/>
-          </a:solidFill>
-          <a:ln>
-            <a:noFill/>
-          </a:ln>
-          <a:effectLst/>
-        </p:spPr>
-        <p:style>
-          <a:lnRef idx="1">
-            <a:schemeClr val="accent1"/>
-          </a:lnRef>
-          <a:fillRef idx="3">
-            <a:schemeClr val="accent1"/>
-          </a:fillRef>
-          <a:effectRef idx="2">
-            <a:schemeClr val="accent1"/>
-          </a:effectRef>
-          <a:fontRef idx="minor">
-            <a:schemeClr val="lt1"/>
-          </a:fontRef>
-        </p:style>
-        <p:txBody>
-          <a:bodyPr rtlCol="0" anchor="ctr"/>
-          <a:lstStyle/>
-          <a:p>
-            <a:pPr algn="ctr"/>
-          </a:p>
-        </p:txBody>
-      </p:sp>
-      <p:sp>
-        <p:nvSpPr>
-          <p:cNvPr id="4" name="TextBox 3"/>
-          <p:cNvSpPr txBox="1"/>
-          <p:nvPr/>
-        </p:nvSpPr>
-        <p:spPr>
-          <a:xfrm>
-            <a:off x="822960" y="1819656"/>
-            <a:ext cx="16642080" cy="548640"/>
-          </a:xfrm>
-          <a:prstGeom prst="rect">
-            <a:avLst/>
-          </a:prstGeom>
-          <a:noFill/>
-        </p:spPr>
-        <p:txBody>
-          <a:bodyPr wrap="square">
-            <a:spAutoFit/>
-          </a:bodyPr>
-          <a:lstStyle/>
-          <a:p>
-            <a:r>
-              <a:rPr sz="1900" b="0" i="1">
-                <a:solidFill>
-                  <a:srgbClr val="5A5A5A"/>
-                </a:solidFill>
-                <a:latin typeface="Times New Roman"/>
-              </a:rPr>
-              <a:t>The measurement track is complete. Nine experiments run end to end; every claim carries a clustered confidence interval.</a:t>
-            </a:r>
-          </a:p>
-        </p:txBody>
-      </p:sp>
-      <p:graphicFrame>
-        <p:nvGraphicFramePr>
-          <p:cNvPr id="5" name="Table 4"/>
-          <p:cNvGraphicFramePr>
-            <a:graphicFrameLocks noGrp="1"/>
-          </p:cNvGraphicFramePr>
-          <p:nvPr/>
-        </p:nvGraphicFramePr>
-        <p:xfrm>
-          <a:off x="822960" y="2514600"/>
-          <a:ext cx="16642080" cy="4754880"/>
-        </p:xfrm>
-        <a:graphic>
-          <a:graphicData uri="http://schemas.openxmlformats.org/drawingml/2006/table">
-            <a:tbl>
-              <a:tblPr firstRow="1" bandRow="1">
-                <a:tableStyleId>{5C22544A-7EE6-4342-B048-85BDC9FD1C3A}</a:tableStyleId>
-              </a:tblPr>
-              <a:tblGrid>
-                <a:gridCol w="7315200"/>
-                <a:gridCol w="2194560"/>
-                <a:gridCol w="7132320"/>
-              </a:tblGrid>
-              <a:tr h="475488">
-                <a:tc>
-                  <a:txBody>
-                    <a:bodyPr/>
-                    <a:lstStyle/>
-                    <a:p>
-                      <a:r>
-                        <a:rPr sz="1900" b="1" i="0">
-                          <a:solidFill>
-                            <a:srgbClr val="111111"/>
-                          </a:solidFill>
-                          <a:latin typeface="Times New Roman"/>
-                        </a:rPr>
-                        <a:t>Workstream</a:t>
-                      </a:r>
-                    </a:p>
-                  </a:txBody>
-                  <a:tcPr anchor="ctr" marL="128016" marR="91440" marT="27432" marB="27432"/>
-                </a:tc>
-                <a:tc>
-                  <a:txBody>
-                    <a:bodyPr/>
-                    <a:lstStyle/>
-                    <a:p>
-                      <a:r>
-                        <a:rPr sz="1900" b="1" i="0">
-                          <a:solidFill>
-                            <a:srgbClr val="111111"/>
-                          </a:solidFill>
-                          <a:latin typeface="Times New Roman"/>
-                        </a:rPr>
-                        <a:t>State</a:t>
-                      </a:r>
-                    </a:p>
-                  </a:txBody>
-                  <a:tcPr anchor="ctr" marL="128016" marR="91440" marT="27432" marB="27432"/>
-                </a:tc>
-                <a:tc>
-                  <a:txBody>
-                    <a:bodyPr/>
-                    <a:lstStyle/>
-                    <a:p>
-                      <a:r>
-                        <a:rPr sz="1900" b="1" i="0">
-                          <a:solidFill>
-                            <a:srgbClr val="111111"/>
-                          </a:solidFill>
-                          <a:latin typeface="Times New Roman"/>
-                        </a:rPr>
-                        <a:t>Evidence</a:t>
-                      </a:r>
-                    </a:p>
-                  </a:txBody>
-                  <a:tcPr anchor="ctr" marL="128016" marR="91440" marT="27432" marB="27432"/>
-                </a:tc>
-              </a:tr>
-              <a:tr h="475488">
-                <a:tc>
-                  <a:txBody>
-                    <a:bodyPr/>
-                    <a:lstStyle/>
-                    <a:p>
-                      <a:r>
-                        <a:rPr sz="1900" b="0" i="0">
-                          <a:solidFill>
-                            <a:srgbClr val="1A1A1A"/>
-                          </a:solidFill>
-                          <a:latin typeface="Times New Roman"/>
-                        </a:rPr>
-                        <a:t>Harness, three-tier store, policies P0 / P1</a:t>
-                      </a:r>
-                    </a:p>
-                  </a:txBody>
-                  <a:tcPr anchor="ctr" marL="128016" marR="91440" marT="27432" marB="27432"/>
-                </a:tc>
-                <a:tc>
-                  <a:txBody>
-                    <a:bodyPr/>
-                    <a:lstStyle/>
-                    <a:p>
-                      <a:r>
-                        <a:rPr sz="1900" b="1" i="0">
-                          <a:solidFill>
-                            <a:srgbClr val="C1272D"/>
-                          </a:solidFill>
-                          <a:latin typeface="Times New Roman"/>
-                        </a:rPr>
-                        <a:t>Complete</a:t>
-                      </a:r>
-                    </a:p>
-                  </a:txBody>
-                  <a:tcPr anchor="ctr" marL="128016" marR="91440" marT="27432" marB="27432"/>
-                </a:tc>
-                <a:tc>
-                  <a:txBody>
-                    <a:bodyPr/>
-                    <a:lstStyle/>
-                    <a:p>
-                      <a:r>
-                        <a:rPr sz="1900" b="0" i="0">
-                          <a:solidFill>
-                            <a:srgbClr val="1A1A1A"/>
-                          </a:solidFill>
-                          <a:latin typeface="Times New Roman"/>
-                        </a:rPr>
-                        <a:t>memgate/ — 5,430 lines of Python</a:t>
-                      </a:r>
-                    </a:p>
-                  </a:txBody>
-                  <a:tcPr anchor="ctr" marL="128016" marR="91440" marT="27432" marB="27432"/>
-                </a:tc>
-              </a:tr>
-              <a:tr h="475488">
-                <a:tc>
-                  <a:txBody>
-                    <a:bodyPr/>
-                    <a:lstStyle/>
-                    <a:p>
-                      <a:r>
-                        <a:rPr sz="1900" b="0" i="0">
-                          <a:solidFill>
-                            <a:srgbClr val="1A1A1A"/>
-                          </a:solidFill>
-                          <a:latin typeface="Times New Roman"/>
-                        </a:rPr>
-                        <a:t>LoCoMo wired; the evaluation leak removed</a:t>
-                      </a:r>
-                    </a:p>
-                  </a:txBody>
-                  <a:tcPr anchor="ctr" marL="128016" marR="91440" marT="27432" marB="27432"/>
-                </a:tc>
-                <a:tc>
-                  <a:txBody>
-                    <a:bodyPr/>
-                    <a:lstStyle/>
-                    <a:p>
-                      <a:r>
-                        <a:rPr sz="1900" b="1" i="0">
-                          <a:solidFill>
-                            <a:srgbClr val="C1272D"/>
-                          </a:solidFill>
-                          <a:latin typeface="Times New Roman"/>
-                        </a:rPr>
-                        <a:t>Complete</a:t>
-                      </a:r>
-                    </a:p>
-                  </a:txBody>
-                  <a:tcPr anchor="ctr" marL="128016" marR="91440" marT="27432" marB="27432"/>
-                </a:tc>
-                <a:tc>
-                  <a:txBody>
-                    <a:bodyPr/>
-                    <a:lstStyle/>
-                    <a:p>
-                      <a:pPr algn="r"/>
-                      <a:r>
-                        <a:rPr sz="1900" b="0" i="0">
-                          <a:solidFill>
-                            <a:srgbClr val="1A1A1A"/>
-                          </a:solidFill>
-                          <a:latin typeface="Times New Roman"/>
-                        </a:rPr>
-                        <a:t>3 label-blindness regression tests</a:t>
-                      </a:r>
-                    </a:p>
-                  </a:txBody>
-                  <a:tcPr anchor="ctr" marL="128016" marR="91440" marT="27432" marB="27432"/>
-                </a:tc>
-              </a:tr>
-              <a:tr h="475488">
-                <a:tc>
-                  <a:txBody>
-                    <a:bodyPr/>
-                    <a:lstStyle/>
-                    <a:p>
-                      <a:r>
-                        <a:rPr sz="1900" b="0" i="0">
-                          <a:solidFill>
-                            <a:srgbClr val="1A1A1A"/>
-                          </a:solidFill>
-                          <a:latin typeface="Times New Roman"/>
-                        </a:rPr>
-                        <a:t>Ablation study — 23 configurations</a:t>
-                      </a:r>
-                    </a:p>
-                  </a:txBody>
-                  <a:tcPr anchor="ctr" marL="128016" marR="91440" marT="27432" marB="27432"/>
-                </a:tc>
-                <a:tc>
-                  <a:txBody>
-                    <a:bodyPr/>
-                    <a:lstStyle/>
-                    <a:p>
-                      <a:r>
-                        <a:rPr sz="1900" b="1" i="0">
-                          <a:solidFill>
-                            <a:srgbClr val="C1272D"/>
-                          </a:solidFill>
-                          <a:latin typeface="Times New Roman"/>
-                        </a:rPr>
-                        <a:t>Complete</a:t>
-                      </a:r>
-                    </a:p>
-                  </a:txBody>
-                  <a:tcPr anchor="ctr" marL="128016" marR="91440" marT="27432" marB="27432"/>
-                </a:tc>
-                <a:tc>
-                  <a:txBody>
-                    <a:bodyPr/>
-                    <a:lstStyle/>
-                    <a:p>
-                      <a:r>
-                        <a:rPr sz="1900" b="0" i="0">
-                          <a:solidFill>
-                            <a:srgbClr val="1A1A1A"/>
-                          </a:solidFill>
-                          <a:latin typeface="Times New Roman"/>
-                        </a:rPr>
-                        <a:t>results/ablations_2048.csv</a:t>
-                      </a:r>
-                    </a:p>
-                  </a:txBody>
-                  <a:tcPr anchor="ctr" marL="128016" marR="91440" marT="27432" marB="27432"/>
-                </a:tc>
-              </a:tr>
-              <a:tr h="475488">
-                <a:tc>
-                  <a:txBody>
-                    <a:bodyPr/>
-                    <a:lstStyle/>
-                    <a:p>
-                      <a:r>
-                        <a:rPr sz="1900" b="0" i="0">
-                          <a:solidFill>
-                            <a:srgbClr val="1A1A1A"/>
-                          </a:solidFill>
-                          <a:latin typeface="Times New Roman"/>
-                        </a:rPr>
-                        <a:t>Storage budget — the corrected accounting</a:t>
-                      </a:r>
-                    </a:p>
-                  </a:txBody>
-                  <a:tcPr anchor="ctr" marL="128016" marR="91440" marT="27432" marB="27432"/>
-                </a:tc>
-                <a:tc>
-                  <a:txBody>
-                    <a:bodyPr/>
-                    <a:lstStyle/>
-                    <a:p>
-                      <a:r>
-                        <a:rPr sz="1900" b="1" i="0">
-                          <a:solidFill>
-                            <a:srgbClr val="C1272D"/>
-                          </a:solidFill>
-                          <a:latin typeface="Times New Roman"/>
-                        </a:rPr>
-                        <a:t>Complete</a:t>
-                      </a:r>
-                    </a:p>
-                  </a:txBody>
-                  <a:tcPr anchor="ctr" marL="128016" marR="91440" marT="27432" marB="27432"/>
-                </a:tc>
-                <a:tc>
-                  <a:txBody>
-                    <a:bodyPr/>
-                    <a:lstStyle/>
-                    <a:p>
-                      <a:pPr algn="r"/>
-                      <a:r>
-                        <a:rPr sz="1900" b="0" i="0">
-                          <a:solidFill>
-                            <a:srgbClr val="1A1A1A"/>
-                          </a:solidFill>
-                          <a:latin typeface="Times New Roman"/>
-                        </a:rPr>
-                        <a:t>35 configurations swept</a:t>
-                      </a:r>
-                    </a:p>
-                  </a:txBody>
-                  <a:tcPr anchor="ctr" marL="128016" marR="91440" marT="27432" marB="27432"/>
-                </a:tc>
-              </a:tr>
-              <a:tr h="475488">
-                <a:tc>
-                  <a:txBody>
-                    <a:bodyPr/>
-                    <a:lstStyle/>
-                    <a:p>
-                      <a:r>
-                        <a:rPr sz="1900" b="0" i="0">
-                          <a:solidFill>
-                            <a:srgbClr val="1A1A1A"/>
-                          </a:solidFill>
-                          <a:latin typeface="Times New Roman"/>
-                        </a:rPr>
-                        <a:t>Significance: bootstrap + exact McNemar</a:t>
-                      </a:r>
-                    </a:p>
-                  </a:txBody>
-                  <a:tcPr anchor="ctr" marL="128016" marR="91440" marT="27432" marB="27432"/>
-                </a:tc>
-                <a:tc>
-                  <a:txBody>
-                    <a:bodyPr/>
-                    <a:lstStyle/>
-                    <a:p>
-                      <a:r>
-                        <a:rPr sz="1900" b="1" i="0">
-                          <a:solidFill>
-                            <a:srgbClr val="C1272D"/>
-                          </a:solidFill>
-                          <a:latin typeface="Times New Roman"/>
-                        </a:rPr>
-                        <a:t>Complete</a:t>
-                      </a:r>
-                    </a:p>
-                  </a:txBody>
-                  <a:tcPr anchor="ctr" marL="128016" marR="91440" marT="27432" marB="27432"/>
-                </a:tc>
-                <a:tc>
-                  <a:txBody>
-                    <a:bodyPr/>
-                    <a:lstStyle/>
-                    <a:p>
-                      <a:r>
-                        <a:rPr sz="1900" b="0" i="0">
-                          <a:solidFill>
-                            <a:srgbClr val="1A1A1A"/>
-                          </a:solidFill>
-                          <a:latin typeface="Times New Roman"/>
-                        </a:rPr>
-                        <a:t>clustered by conversation, B = 10,000</a:t>
-                      </a:r>
-                    </a:p>
-                  </a:txBody>
-                  <a:tcPr anchor="ctr" marL="128016" marR="91440" marT="27432" marB="27432"/>
-                </a:tc>
-              </a:tr>
-              <a:tr h="475488">
-                <a:tc>
-                  <a:txBody>
-                    <a:bodyPr/>
-                    <a:lstStyle/>
-                    <a:p>
-                      <a:r>
-                        <a:rPr sz="1900" b="0" i="0">
-                          <a:solidFill>
-                            <a:srgbClr val="1A1A1A"/>
-                          </a:solidFill>
-                          <a:latin typeface="Times New Roman"/>
-                        </a:rPr>
-                        <a:t>Scaling to 182× · byte accounting · learned scorer</a:t>
-                      </a:r>
-                    </a:p>
-                  </a:txBody>
-                  <a:tcPr anchor="ctr" marL="128016" marR="91440" marT="27432" marB="27432"/>
-                </a:tc>
-                <a:tc>
-                  <a:txBody>
-                    <a:bodyPr/>
-                    <a:lstStyle/>
-                    <a:p>
-                      <a:r>
-                        <a:rPr sz="1900" b="1" i="0">
-                          <a:solidFill>
-                            <a:srgbClr val="C1272D"/>
-                          </a:solidFill>
-                          <a:latin typeface="Times New Roman"/>
-                        </a:rPr>
-                        <a:t>Complete</a:t>
-                      </a:r>
-                    </a:p>
-                  </a:txBody>
-                  <a:tcPr anchor="ctr" marL="128016" marR="91440" marT="27432" marB="27432"/>
-                </a:tc>
-                <a:tc>
-                  <a:txBody>
-                    <a:bodyPr/>
-                    <a:lstStyle/>
-                    <a:p>
-                      <a:r>
-                        <a:rPr sz="1900" b="0" i="0">
-                          <a:solidFill>
-                            <a:srgbClr val="1A1A1A"/>
-                          </a:solidFill>
-                          <a:latin typeface="Times New Roman"/>
-                        </a:rPr>
-                        <a:t>three separate sweeps</a:t>
-                      </a:r>
-                    </a:p>
-                  </a:txBody>
-                  <a:tcPr anchor="ctr" marL="128016" marR="91440" marT="27432" marB="27432"/>
-                </a:tc>
-              </a:tr>
-              <a:tr h="475488">
-                <a:tc>
-                  <a:txBody>
-                    <a:bodyPr/>
-                    <a:lstStyle/>
-                    <a:p>
-                      <a:r>
-                        <a:rPr sz="1900" b="0" i="0">
-                          <a:solidFill>
-                            <a:srgbClr val="1A1A1A"/>
-                          </a:solidFill>
-                          <a:latin typeface="Times New Roman"/>
-                        </a:rPr>
-                        <a:t>P2 LLM judge — built and evaluated</a:t>
-                      </a:r>
-                    </a:p>
-                  </a:txBody>
-                  <a:tcPr anchor="ctr" marL="128016" marR="91440" marT="27432" marB="27432"/>
-                </a:tc>
-                <a:tc>
-                  <a:txBody>
-                    <a:bodyPr/>
-                    <a:lstStyle/>
-                    <a:p>
-                      <a:r>
-                        <a:rPr sz="1900" b="1" i="0">
-                          <a:solidFill>
-                            <a:srgbClr val="C1272D"/>
-                          </a:solidFill>
-                          <a:latin typeface="Times New Roman"/>
-                        </a:rPr>
-                        <a:t>Complete</a:t>
-                      </a:r>
-                    </a:p>
-                  </a:txBody>
-                  <a:tcPr anchor="ctr" marL="128016" marR="91440" marT="27432" marB="27432"/>
-                </a:tc>
-                <a:tc>
-                  <a:txBody>
-                    <a:bodyPr/>
-                    <a:lstStyle/>
-                    <a:p>
-                      <a:r>
-                        <a:rPr sz="1900" b="0" i="0">
-                          <a:solidFill>
-                            <a:srgbClr val="1A1A1A"/>
-                          </a:solidFill>
-                          <a:latin typeface="Times New Roman"/>
-                        </a:rPr>
-                        <a:t>single-component swap, with CIs</a:t>
-                      </a:r>
-                    </a:p>
-                  </a:txBody>
-                  <a:tcPr anchor="ctr" marL="128016" marR="91440" marT="27432" marB="27432"/>
-                </a:tc>
-              </a:tr>
-              <a:tr h="475488">
-                <a:tc>
-                  <a:txBody>
-                    <a:bodyPr/>
-                    <a:lstStyle/>
-                    <a:p>
-                      <a:r>
-                        <a:rPr sz="1900" b="0" i="0">
-                          <a:solidFill>
-                            <a:srgbClr val="1A1A1A"/>
-                          </a:solidFill>
-                          <a:latin typeface="Times New Roman"/>
-                        </a:rPr>
-                        <a:t>End-task accuracy through a real reader</a:t>
-                      </a:r>
-                    </a:p>
-                  </a:txBody>
-                  <a:tcPr anchor="ctr" marL="128016" marR="91440" marT="27432" marB="27432"/>
-                </a:tc>
-                <a:tc>
-                  <a:txBody>
-                    <a:bodyPr/>
-                    <a:lstStyle/>
-                    <a:p>
-                      <a:r>
-                        <a:rPr sz="1900" b="1" i="0">
-                          <a:solidFill>
-                            <a:srgbClr val="C1272D"/>
-                          </a:solidFill>
-                          <a:latin typeface="Times New Roman"/>
-                        </a:rPr>
-                        <a:t>Complete</a:t>
-                      </a:r>
-                    </a:p>
-                  </a:txBody>
-                  <a:tcPr anchor="ctr" marL="128016" marR="91440" marT="27432" marB="27432"/>
-                </a:tc>
-                <a:tc>
-                  <a:txBody>
-                    <a:bodyPr/>
-                    <a:lstStyle/>
-                    <a:p>
-                      <a:r>
-                        <a:rPr sz="1900" b="0" i="0">
-                          <a:solidFill>
-                            <a:srgbClr val="1A1A1A"/>
-                          </a:solidFill>
-                          <a:latin typeface="Times New Roman"/>
-                        </a:rPr>
-                        <a:t>full 715-question run; results/endtask.csv</a:t>
-                      </a:r>
-                    </a:p>
-                  </a:txBody>
-                  <a:tcPr anchor="ctr" marL="128016" marR="91440" marT="27432" marB="27432"/>
-                </a:tc>
-              </a:tr>
-              <a:tr h="475488">
-                <a:tc>
-                  <a:txBody>
-                    <a:bodyPr/>
-                    <a:lstStyle/>
-                    <a:p>
-                      <a:r>
-                        <a:rPr sz="1900" b="0" i="0">
-                          <a:solidFill>
-                            <a:srgbClr val="1A1A1A"/>
-                          </a:solidFill>
-                          <a:latin typeface="Times New Roman"/>
-                        </a:rPr>
-                        <a:t>Abstractive compression · LongMemEval · online learning</a:t>
-                      </a:r>
-                    </a:p>
-                  </a:txBody>
-                  <a:tcPr anchor="ctr" marL="128016" marR="91440" marT="27432" marB="27432"/>
-                </a:tc>
-                <a:tc>
-                  <a:txBody>
-                    <a:bodyPr/>
-                    <a:lstStyle/>
-                    <a:p>
-                      <a:r>
-                        <a:rPr sz="1900" b="0" i="0">
-                          <a:solidFill>
-                            <a:srgbClr val="1A1A1A"/>
-                          </a:solidFill>
-                          <a:latin typeface="Times New Roman"/>
-                        </a:rPr>
-                        <a:t>Not started</a:t>
-                      </a:r>
-                    </a:p>
-                  </a:txBody>
-                  <a:tcPr anchor="ctr" marL="128016" marR="91440" marT="27432" marB="27432"/>
-                </a:tc>
-                <a:tc>
-                  <a:txBody>
-                    <a:bodyPr/>
-                    <a:lstStyle/>
-                    <a:p>
-                      <a:r>
-                        <a:rPr sz="1900" b="0" i="0">
-                          <a:solidFill>
-                            <a:srgbClr val="1A1A1A"/>
-                          </a:solidFill>
-                          <a:latin typeface="Times New Roman"/>
-                        </a:rPr>
-                        <a:t>scoped, with effort estimates</a:t>
-                      </a:r>
-                    </a:p>
-                  </a:txBody>
-                  <a:tcPr anchor="ctr" marL="128016" marR="91440" marT="27432" marB="27432"/>
-                </a:tc>
-              </a:tr>
-            </a:tbl>
-          </a:graphicData>
-        </a:graphic>
-      </p:graphicFrame>
-      <p:sp>
-        <p:nvSpPr>
-          <p:cNvPr id="6" name="Rectangle 5"/>
-          <p:cNvSpPr/>
-          <p:nvPr/>
-        </p:nvSpPr>
-        <p:spPr>
-          <a:xfrm>
-            <a:off x="822960" y="8595360"/>
-            <a:ext cx="64008" cy="1051560"/>
-          </a:xfrm>
-          <a:prstGeom prst="rect">
-            <a:avLst/>
-          </a:prstGeom>
-          <a:solidFill>
-            <a:srgbClr val="C1272D"/>
-          </a:solidFill>
-          <a:ln>
-            <a:noFill/>
-          </a:ln>
-          <a:effectLst/>
-        </p:spPr>
-        <p:style>
-          <a:lnRef idx="1">
-            <a:schemeClr val="accent1"/>
-          </a:lnRef>
-          <a:fillRef idx="3">
-            <a:schemeClr val="accent1"/>
-          </a:fillRef>
-          <a:effectRef idx="2">
-            <a:schemeClr val="accent1"/>
-          </a:effectRef>
-          <a:fontRef idx="minor">
-            <a:schemeClr val="lt1"/>
-          </a:fontRef>
-        </p:style>
-        <p:txBody>
-          <a:bodyPr rtlCol="0" anchor="ctr"/>
-          <a:lstStyle/>
-          <a:p>
-            <a:pPr algn="ctr"/>
-          </a:p>
-        </p:txBody>
-      </p:sp>
-      <p:sp>
-        <p:nvSpPr>
-          <p:cNvPr id="7" name="Rectangle 6"/>
-          <p:cNvSpPr/>
-          <p:nvPr/>
-        </p:nvSpPr>
-        <p:spPr>
-          <a:xfrm>
-            <a:off x="886968" y="8595360"/>
-            <a:ext cx="16578072" cy="1051560"/>
-          </a:xfrm>
-          <a:prstGeom prst="rect">
-            <a:avLst/>
-          </a:prstGeom>
-          <a:solidFill>
-            <a:srgbClr val="F2F2F0"/>
-          </a:solidFill>
-          <a:ln>
-            <a:noFill/>
-          </a:ln>
-          <a:effectLst/>
-        </p:spPr>
-        <p:style>
-          <a:lnRef idx="1">
-            <a:schemeClr val="accent1"/>
-          </a:lnRef>
-          <a:fillRef idx="3">
-            <a:schemeClr val="accent1"/>
-          </a:fillRef>
-          <a:effectRef idx="2">
-            <a:schemeClr val="accent1"/>
-          </a:effectRef>
-          <a:fontRef idx="minor">
-            <a:schemeClr val="lt1"/>
-          </a:fontRef>
-        </p:style>
-        <p:txBody>
-          <a:bodyPr rtlCol="0" anchor="ctr"/>
-          <a:lstStyle/>
-          <a:p>
-            <a:pPr algn="ctr"/>
-          </a:p>
-        </p:txBody>
-      </p:sp>
-      <p:sp>
-        <p:nvSpPr>
-          <p:cNvPr id="8" name="TextBox 7"/>
-          <p:cNvSpPr txBox="1"/>
-          <p:nvPr/>
-        </p:nvSpPr>
-        <p:spPr>
-          <a:xfrm>
-            <a:off x="1115568" y="8686800"/>
-            <a:ext cx="16002000" cy="868680"/>
-          </a:xfrm>
-          <a:prstGeom prst="rect">
-            <a:avLst/>
-          </a:prstGeom>
-          <a:noFill/>
-        </p:spPr>
-        <p:txBody>
-          <a:bodyPr wrap="square" anchor="ctr">
-            <a:spAutoFit/>
-          </a:bodyPr>
-          <a:lstStyle/>
-          <a:p>
-            <a:pPr>
-              <a:lnSpc>
-                <a:spcPct val="105000"/>
-              </a:lnSpc>
-            </a:pPr>
-            <a:r>
-              <a:rPr sz="2300" b="0" i="0">
-                <a:solidFill>
-                  <a:srgbClr val="1A1A1A"/>
-                </a:solidFill>
-                <a:latin typeface="Times New Roman"/>
-              </a:rPr>
-              <a:t>The headline:  </a:t>
-            </a:r>
-            <a:r>
-              <a:rPr sz="2300" b="1" i="0">
-                <a:solidFill>
-                  <a:srgbClr val="1A1A1A"/>
-                </a:solidFill>
-                <a:latin typeface="Times New Roman"/>
-              </a:rPr>
-              <a:t>+8.7 answer-recall points</a:t>
-            </a:r>
-            <a:r>
-              <a:rPr sz="2300" b="0" i="0">
-                <a:solidFill>
-                  <a:srgbClr val="1A1A1A"/>
-                </a:solidFill>
-                <a:latin typeface="Times New Roman"/>
-              </a:rPr>
-              <a:t> for choosing which turns to forget, over forgetting oldest-first — at identical storage, fidelity and retrieval.</a:t>
-            </a:r>
-          </a:p>
-        </p:txBody>
-      </p:sp>
-    </p:spTree>
-  </p:cSld>
-  <p:clrMapOvr>
-    <a:masterClrMapping/>
-  </p:clrMapOvr>
-</p:sld>
-</file>
-
-<file path=ppt/slides/slide20.xml><?xml version="1.0" encoding="utf-8"?>
+<file path=ppt/slides/slide22.xml><?xml version="1.0" encoding="utf-8"?>
 <p:sld xmlns:a="http://schemas.openxmlformats.org/drawingml/2006/main" xmlns:p="http://schemas.openxmlformats.org/presentationml/2006/main" xmlns:r="http://schemas.openxmlformats.org/officeDocument/2006/relationships">
   <p:cSld>
     <p:spTree>
@@ -12897,7 +14566,7 @@
 </p:sld>
 </file>
 
-<file path=ppt/slides/slide21.xml><?xml version="1.0" encoding="utf-8"?>
+<file path=ppt/slides/slide23.xml><?xml version="1.0" encoding="utf-8"?>
 <p:sld xmlns:a="http://schemas.openxmlformats.org/drawingml/2006/main" xmlns:p="http://schemas.openxmlformats.org/presentationml/2006/main" xmlns:r="http://schemas.openxmlformats.org/officeDocument/2006/relationships">
   <p:cSld>
     <p:spTree>
@@ -13028,7 +14697,7 @@
         <p:spPr>
           <a:xfrm>
             <a:off x="822960" y="2514600"/>
-            <a:ext cx="16642080" cy="4338574"/>
+            <a:ext cx="16642080" cy="5201666"/>
           </a:xfrm>
           <a:prstGeom prst="rect">
             <a:avLst/>
@@ -13148,7 +14817,7 @@
                 </a:solidFill>
                 <a:latin typeface="Times New Roman"/>
               </a:rPr>
-              <a:t>— the complete working record, §1–§28, written to be picked up cold.</a:t>
+              <a:t>— the complete working record, §1–§33, written to be picked up cold.</a:t>
             </a:r>
           </a:p>
           <a:p>
@@ -13222,7 +14891,44 @@
                 </a:solidFill>
                 <a:latin typeface="Times New Roman"/>
               </a:rPr>
-              <a:t>— 5,430 lines of Python: the library, 13 runnable experiments, 61 tests.</a:t>
+              <a:t>— ~6,500 lines of Python: the library, 17 runnable experiments, 68 tests.</a:t>
+            </a:r>
+          </a:p>
+          <a:p>
+            <a:pPr>
+              <a:lnSpc>
+                <a:spcPct val="105000"/>
+              </a:lnSpc>
+              <a:spcAft>
+                <a:spcPts val="1000"/>
+              </a:spcAft>
+            </a:pPr>
+            <a:r>
+              <a:rPr sz="2300" b="0" i="0">
+                <a:solidFill>
+                  <a:srgbClr val="C1272D"/>
+                </a:solidFill>
+                <a:latin typeface="Times New Roman"/>
+              </a:rPr>
+              <a:t>•  </a:t>
+            </a:r>
+            <a:r>
+              <a:rPr sz="2300" b="1" i="0">
+                <a:solidFill>
+                  <a:srgbClr val="1A1A1A"/>
+                </a:solidFill>
+                <a:latin typeface="Times New Roman"/>
+              </a:rPr>
+              <a:t>paper/main.pdf </a:t>
+            </a:r>
+            <a:r>
+              <a:rPr sz="2300" b="0" i="0">
+                <a:solidFill>
+                  <a:srgbClr val="1A1A1A"/>
+                </a:solidFill>
+                <a:latin typeface="Times New Roman"/>
+              </a:rPr>
+              <a:t>— the IEEE conference paper, 6 pages, compiled from paper/main.tex with every table generated from the committed CSVs.</a:t>
             </a:r>
           </a:p>
           <a:p>
@@ -13436,7 +15142,7 @@
 </p:sld>
 </file>
 
-<file path=ppt/slides/slide22.xml><?xml version="1.0" encoding="utf-8"?>
+<file path=ppt/slides/slide24.xml><?xml version="1.0" encoding="utf-8"?>
 <p:sld xmlns:a="http://schemas.openxmlformats.org/drawingml/2006/main" xmlns:p="http://schemas.openxmlformats.org/presentationml/2006/main" xmlns:r="http://schemas.openxmlformats.org/officeDocument/2006/relationships">
   <p:cSld>
     <p:spTree>
@@ -14347,7 +16053,7 @@
             <a:r>
               <a:rPr sz="1700" b="0" i="0">
                 <a:solidFill>
-                  <a:srgbClr val="5A5A5A"/>
+                  <a:srgbClr val="1A1A1A"/>
                 </a:solidFill>
                 <a:latin typeface="Times New Roman"/>
               </a:rPr>
@@ -14366,6 +16072,240 @@
           <a:xfrm>
             <a:off x="10558272" y="6464807"/>
             <a:ext cx="1359408" cy="365760"/>
+          </a:xfrm>
+          <a:prstGeom prst="roundRect">
+            <a:avLst/>
+          </a:prstGeom>
+          <a:solidFill>
+            <a:srgbClr val="C1272D"/>
+          </a:solidFill>
+          <a:ln>
+            <a:noFill/>
+          </a:ln>
+          <a:effectLst/>
+        </p:spPr>
+        <p:style>
+          <a:lnRef idx="1">
+            <a:schemeClr val="accent1"/>
+          </a:lnRef>
+          <a:fillRef idx="3">
+            <a:schemeClr val="accent1"/>
+          </a:fillRef>
+          <a:effectRef idx="2">
+            <a:schemeClr val="accent1"/>
+          </a:effectRef>
+          <a:fontRef idx="minor">
+            <a:schemeClr val="lt1"/>
+          </a:fontRef>
+        </p:style>
+        <p:txBody>
+          <a:bodyPr rtlCol="0" anchor="ctr"/>
+          <a:lstStyle/>
+          <a:p>
+            <a:pPr algn="ctr"/>
+          </a:p>
+        </p:txBody>
+      </p:sp>
+      <p:sp>
+        <p:nvSpPr>
+          <p:cNvPr id="24" name="TextBox 23"/>
+          <p:cNvSpPr txBox="1"/>
+          <p:nvPr/>
+        </p:nvSpPr>
+        <p:spPr>
+          <a:xfrm>
+            <a:off x="822960" y="6931152"/>
+            <a:ext cx="5486400" cy="457200"/>
+          </a:xfrm>
+          <a:prstGeom prst="rect">
+            <a:avLst/>
+          </a:prstGeom>
+          <a:noFill/>
+        </p:spPr>
+        <p:txBody>
+          <a:bodyPr wrap="square">
+            <a:spAutoFit/>
+          </a:bodyPr>
+          <a:lstStyle/>
+          <a:p>
+            <a:r>
+              <a:rPr sz="1700" b="0" i="0">
+                <a:solidFill>
+                  <a:srgbClr val="1A1A1A"/>
+                </a:solidFill>
+                <a:latin typeface="Times New Roman"/>
+              </a:rPr>
+              <a:t>LongMemEval + the scorer-transfer finding</a:t>
+            </a:r>
+          </a:p>
+        </p:txBody>
+      </p:sp>
+      <p:sp>
+        <p:nvSpPr>
+          <p:cNvPr id="25" name="Rounded Rectangle 24"/>
+          <p:cNvSpPr/>
+          <p:nvPr/>
+        </p:nvSpPr>
+        <p:spPr>
+          <a:xfrm>
+            <a:off x="11088624" y="7013448"/>
+            <a:ext cx="1536192" cy="365760"/>
+          </a:xfrm>
+          <a:prstGeom prst="roundRect">
+            <a:avLst/>
+          </a:prstGeom>
+          <a:solidFill>
+            <a:srgbClr val="C1272D"/>
+          </a:solidFill>
+          <a:ln>
+            <a:noFill/>
+          </a:ln>
+          <a:effectLst/>
+        </p:spPr>
+        <p:style>
+          <a:lnRef idx="1">
+            <a:schemeClr val="accent1"/>
+          </a:lnRef>
+          <a:fillRef idx="3">
+            <a:schemeClr val="accent1"/>
+          </a:fillRef>
+          <a:effectRef idx="2">
+            <a:schemeClr val="accent1"/>
+          </a:effectRef>
+          <a:fontRef idx="minor">
+            <a:schemeClr val="lt1"/>
+          </a:fontRef>
+        </p:style>
+        <p:txBody>
+          <a:bodyPr rtlCol="0" anchor="ctr"/>
+          <a:lstStyle/>
+          <a:p>
+            <a:pPr algn="ctr"/>
+          </a:p>
+        </p:txBody>
+      </p:sp>
+      <p:sp>
+        <p:nvSpPr>
+          <p:cNvPr id="26" name="TextBox 25"/>
+          <p:cNvSpPr txBox="1"/>
+          <p:nvPr/>
+        </p:nvSpPr>
+        <p:spPr>
+          <a:xfrm>
+            <a:off x="822960" y="7479792"/>
+            <a:ext cx="5486400" cy="457200"/>
+          </a:xfrm>
+          <a:prstGeom prst="rect">
+            <a:avLst/>
+          </a:prstGeom>
+          <a:noFill/>
+        </p:spPr>
+        <p:txBody>
+          <a:bodyPr wrap="square">
+            <a:spAutoFit/>
+          </a:bodyPr>
+          <a:lstStyle/>
+          <a:p>
+            <a:r>
+              <a:rPr sz="1700" b="0" i="0">
+                <a:solidFill>
+                  <a:srgbClr val="1A1A1A"/>
+                </a:solidFill>
+                <a:latin typeface="Times New Roman"/>
+              </a:rPr>
+              <a:t>IEEE paper: compiled, cut to 6 pages</a:t>
+            </a:r>
+          </a:p>
+        </p:txBody>
+      </p:sp>
+      <p:sp>
+        <p:nvSpPr>
+          <p:cNvPr id="27" name="Rounded Rectangle 26"/>
+          <p:cNvSpPr/>
+          <p:nvPr/>
+        </p:nvSpPr>
+        <p:spPr>
+          <a:xfrm>
+            <a:off x="11442192" y="7562088"/>
+            <a:ext cx="1005839" cy="365760"/>
+          </a:xfrm>
+          <a:prstGeom prst="roundRect">
+            <a:avLst/>
+          </a:prstGeom>
+          <a:solidFill>
+            <a:srgbClr val="C1272D"/>
+          </a:solidFill>
+          <a:ln>
+            <a:noFill/>
+          </a:ln>
+          <a:effectLst/>
+        </p:spPr>
+        <p:style>
+          <a:lnRef idx="1">
+            <a:schemeClr val="accent1"/>
+          </a:lnRef>
+          <a:fillRef idx="3">
+            <a:schemeClr val="accent1"/>
+          </a:fillRef>
+          <a:effectRef idx="2">
+            <a:schemeClr val="accent1"/>
+          </a:effectRef>
+          <a:fontRef idx="minor">
+            <a:schemeClr val="lt1"/>
+          </a:fontRef>
+        </p:style>
+        <p:txBody>
+          <a:bodyPr rtlCol="0" anchor="ctr"/>
+          <a:lstStyle/>
+          <a:p>
+            <a:pPr algn="ctr"/>
+          </a:p>
+        </p:txBody>
+      </p:sp>
+      <p:sp>
+        <p:nvSpPr>
+          <p:cNvPr id="28" name="TextBox 27"/>
+          <p:cNvSpPr txBox="1"/>
+          <p:nvPr/>
+        </p:nvSpPr>
+        <p:spPr>
+          <a:xfrm>
+            <a:off x="822960" y="8028431"/>
+            <a:ext cx="5486400" cy="457200"/>
+          </a:xfrm>
+          <a:prstGeom prst="rect">
+            <a:avLst/>
+          </a:prstGeom>
+          <a:noFill/>
+        </p:spPr>
+        <p:txBody>
+          <a:bodyPr wrap="square">
+            <a:spAutoFit/>
+          </a:bodyPr>
+          <a:lstStyle/>
+          <a:p>
+            <a:r>
+              <a:rPr sz="1700" b="0" i="0">
+                <a:solidFill>
+                  <a:srgbClr val="5A5A5A"/>
+                </a:solidFill>
+                <a:latin typeface="Times New Roman"/>
+              </a:rPr>
+              <a:t>Abstractive compression to all ten conversations</a:t>
+            </a:r>
+          </a:p>
+        </p:txBody>
+      </p:sp>
+      <p:sp>
+        <p:nvSpPr>
+          <p:cNvPr id="29" name="Rounded Rectangle 28"/>
+          <p:cNvSpPr/>
+          <p:nvPr/>
+        </p:nvSpPr>
+        <p:spPr>
+          <a:xfrm>
+            <a:off x="12502896" y="8110727"/>
+            <a:ext cx="1712976" cy="365760"/>
           </a:xfrm>
           <a:prstGeom prst="roundRect">
             <a:avLst/>
@@ -14402,13 +16342,13 @@
       </p:sp>
       <p:sp>
         <p:nvSpPr>
-          <p:cNvPr id="24" name="TextBox 23"/>
+          <p:cNvPr id="30" name="TextBox 29"/>
           <p:cNvSpPr txBox="1"/>
           <p:nvPr/>
         </p:nvSpPr>
         <p:spPr>
           <a:xfrm>
-            <a:off x="822960" y="6931152"/>
+            <a:off x="822960" y="8577072"/>
             <a:ext cx="5486400" cy="457200"/>
           </a:xfrm>
           <a:prstGeom prst="rect">
@@ -14429,98 +16369,20 @@
                 </a:solidFill>
                 <a:latin typeface="Times New Roman"/>
               </a:rPr>
-              <a:t>Abstractive compression + LongMemEval</a:t>
-            </a:r>
-          </a:p>
-        </p:txBody>
-      </p:sp>
-      <p:sp>
-        <p:nvSpPr>
-          <p:cNvPr id="25" name="Rounded Rectangle 24"/>
+              <a:t>Online learning of the eviction policy</a:t>
+            </a:r>
+          </a:p>
+        </p:txBody>
+      </p:sp>
+      <p:sp>
+        <p:nvSpPr>
+          <p:cNvPr id="31" name="Rounded Rectangle 30"/>
           <p:cNvSpPr/>
           <p:nvPr/>
         </p:nvSpPr>
         <p:spPr>
           <a:xfrm>
-            <a:off x="11795760" y="7013448"/>
-            <a:ext cx="2420112" cy="365760"/>
-          </a:xfrm>
-          <a:prstGeom prst="roundRect">
-            <a:avLst/>
-          </a:prstGeom>
-          <a:solidFill>
-            <a:srgbClr val="DDDDDA"/>
-          </a:solidFill>
-          <a:ln>
-            <a:noFill/>
-          </a:ln>
-          <a:effectLst/>
-        </p:spPr>
-        <p:style>
-          <a:lnRef idx="1">
-            <a:schemeClr val="accent1"/>
-          </a:lnRef>
-          <a:fillRef idx="3">
-            <a:schemeClr val="accent1"/>
-          </a:fillRef>
-          <a:effectRef idx="2">
-            <a:schemeClr val="accent1"/>
-          </a:effectRef>
-          <a:fontRef idx="minor">
-            <a:schemeClr val="lt1"/>
-          </a:fontRef>
-        </p:style>
-        <p:txBody>
-          <a:bodyPr rtlCol="0" anchor="ctr"/>
-          <a:lstStyle/>
-          <a:p>
-            <a:pPr algn="ctr"/>
-          </a:p>
-        </p:txBody>
-      </p:sp>
-      <p:sp>
-        <p:nvSpPr>
-          <p:cNvPr id="26" name="TextBox 25"/>
-          <p:cNvSpPr txBox="1"/>
-          <p:nvPr/>
-        </p:nvSpPr>
-        <p:spPr>
-          <a:xfrm>
-            <a:off x="822960" y="7479792"/>
-            <a:ext cx="5486400" cy="457200"/>
-          </a:xfrm>
-          <a:prstGeom prst="rect">
-            <a:avLst/>
-          </a:prstGeom>
-          <a:noFill/>
-        </p:spPr>
-        <p:txBody>
-          <a:bodyPr wrap="square">
-            <a:spAutoFit/>
-          </a:bodyPr>
-          <a:lstStyle/>
-          <a:p>
-            <a:r>
-              <a:rPr sz="1700" b="0" i="0">
-                <a:solidFill>
-                  <a:srgbClr val="5A5A5A"/>
-                </a:solidFill>
-                <a:latin typeface="Times New Roman"/>
-              </a:rPr>
-              <a:t>Online learning of the eviction policy</a:t>
-            </a:r>
-          </a:p>
-        </p:txBody>
-      </p:sp>
-      <p:sp>
-        <p:nvSpPr>
-          <p:cNvPr id="27" name="Rounded Rectangle 26"/>
-          <p:cNvSpPr/>
-          <p:nvPr/>
-        </p:nvSpPr>
-        <p:spPr>
-          <a:xfrm>
-            <a:off x="13563600" y="7562088"/>
+            <a:off x="13563600" y="8659367"/>
             <a:ext cx="2066543" cy="365760"/>
           </a:xfrm>
           <a:prstGeom prst="roundRect">
@@ -14558,13 +16420,13 @@
       </p:sp>
       <p:sp>
         <p:nvSpPr>
-          <p:cNvPr id="28" name="TextBox 27"/>
+          <p:cNvPr id="32" name="TextBox 31"/>
           <p:cNvSpPr txBox="1"/>
           <p:nvPr/>
         </p:nvSpPr>
         <p:spPr>
           <a:xfrm>
-            <a:off x="822960" y="8028431"/>
+            <a:off x="822960" y="9125712"/>
             <a:ext cx="5486400" cy="457200"/>
           </a:xfrm>
           <a:prstGeom prst="rect">
@@ -14592,13 +16454,13 @@
       </p:sp>
       <p:sp>
         <p:nvSpPr>
-          <p:cNvPr id="29" name="Rounded Rectangle 28"/>
+          <p:cNvPr id="33" name="Rounded Rectangle 32"/>
           <p:cNvSpPr/>
           <p:nvPr/>
         </p:nvSpPr>
         <p:spPr>
           <a:xfrm>
-            <a:off x="14977872" y="8110727"/>
+            <a:off x="14977872" y="9208008"/>
             <a:ext cx="2066543" cy="365760"/>
           </a:xfrm>
           <a:prstGeom prst="roundRect">
@@ -14636,13 +16498,13 @@
       </p:sp>
       <p:sp>
         <p:nvSpPr>
-          <p:cNvPr id="30" name="TextBox 29"/>
+          <p:cNvPr id="34" name="TextBox 33"/>
           <p:cNvSpPr txBox="1"/>
           <p:nvPr/>
         </p:nvSpPr>
         <p:spPr>
           <a:xfrm>
-            <a:off x="5843016" y="8705088"/>
+            <a:off x="5843016" y="9802367"/>
             <a:ext cx="1828800" cy="310896"/>
           </a:xfrm>
           <a:prstGeom prst="rect">
@@ -14671,13 +16533,13 @@
       </p:sp>
       <p:sp>
         <p:nvSpPr>
-          <p:cNvPr id="31" name="TextBox 30"/>
+          <p:cNvPr id="35" name="TextBox 34"/>
           <p:cNvSpPr txBox="1"/>
           <p:nvPr/>
         </p:nvSpPr>
         <p:spPr>
           <a:xfrm>
-            <a:off x="9378696" y="8705088"/>
+            <a:off x="9378696" y="9802367"/>
             <a:ext cx="1828800" cy="310896"/>
           </a:xfrm>
           <a:prstGeom prst="rect">
@@ -14706,13 +16568,13 @@
       </p:sp>
       <p:sp>
         <p:nvSpPr>
-          <p:cNvPr id="32" name="TextBox 31"/>
+          <p:cNvPr id="36" name="TextBox 35"/>
           <p:cNvSpPr txBox="1"/>
           <p:nvPr/>
         </p:nvSpPr>
         <p:spPr>
           <a:xfrm>
-            <a:off x="11500104" y="8705088"/>
+            <a:off x="11500104" y="9802367"/>
             <a:ext cx="1828800" cy="310896"/>
           </a:xfrm>
           <a:prstGeom prst="rect">
@@ -14741,13 +16603,13 @@
       </p:sp>
       <p:sp>
         <p:nvSpPr>
-          <p:cNvPr id="33" name="TextBox 32"/>
+          <p:cNvPr id="37" name="TextBox 36"/>
           <p:cNvSpPr txBox="1"/>
           <p:nvPr/>
         </p:nvSpPr>
         <p:spPr>
           <a:xfrm>
-            <a:off x="14682216" y="8705088"/>
+            <a:off x="14682216" y="9802367"/>
             <a:ext cx="1828800" cy="310896"/>
           </a:xfrm>
           <a:prstGeom prst="rect">
@@ -14776,7 +16638,7 @@
       </p:sp>
       <p:sp>
         <p:nvSpPr>
-          <p:cNvPr id="34" name="TextBox 33"/>
+          <p:cNvPr id="38" name="TextBox 37"/>
           <p:cNvSpPr txBox="1"/>
           <p:nvPr/>
         </p:nvSpPr>
@@ -14804,7 +16666,7 @@
                 </a:solidFill>
                 <a:latin typeface="Times New Roman"/>
               </a:rPr>
-              <a:t>Filled bars are complete. The critical path to the final review is the full end-task run — the pipeline is built and validated; what it needs is machine time.</a:t>
+              <a:t>Filled bars are complete. The critical path closed in September: the end-task run, LongMemEval, and a compiled paper. What remains is a scorer that transfers across corpora — which LongMemEval turned from a nice-to-have into the live question.</a:t>
             </a:r>
           </a:p>
         </p:txBody>
@@ -14817,7 +16679,7 @@
 </p:sld>
 </file>
 
-<file path=ppt/slides/slide23.xml><?xml version="1.0" encoding="utf-8"?>
+<file path=ppt/slides/slide25.xml><?xml version="1.0" encoding="utf-8"?>
 <p:sld xmlns:a="http://schemas.openxmlformats.org/drawingml/2006/main" xmlns:p="http://schemas.openxmlformats.org/presentationml/2006/main" xmlns:r="http://schemas.openxmlformats.org/officeDocument/2006/relationships">
   <p:cSld>
     <p:spTree>
@@ -15105,6 +16967,62 @@
               <a:t>P3-learned is a headroom bound, not a component: a live agent has no future questions.</a:t>
             </a:r>
           </a:p>
+          <a:p>
+            <a:pPr>
+              <a:lnSpc>
+                <a:spcPct val="103000"/>
+              </a:lnSpc>
+              <a:spcBef>
+                <a:spcPts val="900"/>
+              </a:spcBef>
+            </a:pPr>
+            <a:r>
+              <a:rPr sz="2000" b="0" i="0">
+                <a:solidFill>
+                  <a:srgbClr val="C1272D"/>
+                </a:solidFill>
+                <a:latin typeface="Times New Roman"/>
+              </a:rPr>
+              <a:t>•  </a:t>
+            </a:r>
+            <a:r>
+              <a:rPr sz="2000" b="0" i="0">
+                <a:solidFill>
+                  <a:srgbClr val="1A1A1A"/>
+                </a:solidFill>
+                <a:latin typeface="Times New Roman"/>
+              </a:rPr>
+              <a:t>The scorer is tuned to LoCoMo. Read +8.7 as what a policy recovers given a scorer that suits the corpus — not as a property of scored selection in general.</a:t>
+            </a:r>
+          </a:p>
+          <a:p>
+            <a:pPr>
+              <a:lnSpc>
+                <a:spcPct val="103000"/>
+              </a:lnSpc>
+              <a:spcBef>
+                <a:spcPts val="900"/>
+              </a:spcBef>
+            </a:pPr>
+            <a:r>
+              <a:rPr sz="2000" b="0" i="0">
+                <a:solidFill>
+                  <a:srgbClr val="C1272D"/>
+                </a:solidFill>
+                <a:latin typeface="Times New Roman"/>
+              </a:rPr>
+              <a:t>•  </a:t>
+            </a:r>
+            <a:r>
+              <a:rPr sz="2000" b="0" i="0">
+                <a:solidFill>
+                  <a:srgbClr val="1A1A1A"/>
+                </a:solidFill>
+                <a:latin typeface="Times New Roman"/>
+              </a:rPr>
+              <a:t>On LongMemEval, strict recall is uninterpretable for a compressing arm: a gist carries the evidence id of text it discarded. Answer recall is unaffected.</a:t>
+            </a:r>
+          </a:p>
         </p:txBody>
       </p:sp>
       <p:sp>
@@ -15164,7 +17082,7 @@
                 </a:solidFill>
                 <a:latin typeface="Times New Roman"/>
               </a:rPr>
-              <a:t>Full 715-question end-task run. Converts the project from a ceiling to an accuracy claim; pipeline, controls and cache already validated.</a:t>
+              <a:t>A scorer that transfers across corpora. LongMemEval turned this from a nice-to-have into the project's live question.</a:t>
             </a:r>
             <a:r>
               <a:rPr sz="1800" b="0" i="1">
@@ -15173,7 +17091,7 @@
                 </a:solidFill>
                 <a:latin typeface="Times New Roman"/>
               </a:rPr>
-              <a:t>   ~4–6 h, resumable</a:t>
+              <a:t>   the critical path</a:t>
             </a:r>
           </a:p>
           <a:p>
@@ -15201,7 +17119,7 @@
                 </a:solidFill>
                 <a:latin typeface="Times New Roman"/>
               </a:rPr>
-              <a:t>Abstractive compression, to test whether the negative result is specific to extractive methods.</a:t>
+              <a:t>Abstractive compression to all ten conversations. Built and running, but the result on disk is one conversation — a single cluster, so its intervals are degenerate and not quotable.</a:t>
             </a:r>
             <a:r>
               <a:rPr sz="1800" b="0" i="1">
@@ -15210,7 +17128,7 @@
                 </a:solidFill>
                 <a:latin typeface="Times New Roman"/>
               </a:rPr>
-              <a:t>   1 session</a:t>
+              <a:t>   ~4 h of generation</a:t>
             </a:r>
           </a:p>
           <a:p>
@@ -15238,7 +17156,7 @@
                 </a:solidFill>
                 <a:latin typeface="Times New Roman"/>
               </a:rPr>
-              <a:t>LongMemEval — genuinely long single conversations, replacing the concatenated-stream stress test.</a:t>
+              <a:t>Online learning of the eviction policy — the only route that makes a learned scorer deployable. Built; pilot-scale at two conversations.</a:t>
             </a:r>
             <a:r>
               <a:rPr sz="1800" b="0" i="1">
@@ -15247,7 +17165,7 @@
                 </a:solidFill>
                 <a:latin typeface="Times New Roman"/>
               </a:rPr>
-              <a:t>   1–2 sessions</a:t>
+              <a:t>   1 session</a:t>
             </a:r>
           </a:p>
           <a:p>
@@ -15275,7 +17193,7 @@
                 </a:solidFill>
                 <a:latin typeface="Times New Roman"/>
               </a:rPr>
-              <a:t>Online learning of the eviction policy — the only route that makes a learned scorer deployable.</a:t>
+              <a:t>The S=32,768 LongMemEval point, to close the retention sweep.</a:t>
             </a:r>
             <a:r>
               <a:rPr sz="1800" b="0" i="1">
@@ -15284,7 +17202,7 @@
                 </a:solidFill>
                 <a:latin typeface="Times New Roman"/>
               </a:rPr>
-              <a:t>   2 sessions</a:t>
+              <a:t>   ~20 min, alone</a:t>
             </a:r>
           </a:p>
         </p:txBody>
@@ -15297,7 +17215,7 @@
 </p:sld>
 </file>
 
-<file path=ppt/slides/slide24.xml><?xml version="1.0" encoding="utf-8"?>
+<file path=ppt/slides/slide26.xml><?xml version="1.0" encoding="utf-8"?>
 <p:sld xmlns:a="http://schemas.openxmlformats.org/drawingml/2006/main" xmlns:p="http://schemas.openxmlformats.org/presentationml/2006/main" xmlns:r="http://schemas.openxmlformats.org/officeDocument/2006/relationships">
   <p:cSld>
     <p:spTree>
@@ -15394,7 +17312,7 @@
         <p:spPr>
           <a:xfrm>
             <a:off x="822960" y="2212848"/>
-            <a:ext cx="16642080" cy="4228592"/>
+            <a:ext cx="16642080" cy="4579620"/>
           </a:xfrm>
           <a:prstGeom prst="rect">
             <a:avLst/>
@@ -15416,7 +17334,7 @@
               </a:spcAft>
             </a:pPr>
             <a:r>
-              <a:rPr sz="2400" b="0" i="0">
+              <a:rPr sz="2300" b="0" i="0">
                 <a:solidFill>
                   <a:srgbClr val="C1272D"/>
                 </a:solidFill>
@@ -15425,7 +17343,7 @@
               <a:t>•  </a:t>
             </a:r>
             <a:r>
-              <a:rPr sz="2400" b="1" i="0">
+              <a:rPr sz="2300" b="1" i="0">
                 <a:solidFill>
                   <a:srgbClr val="1A1A1A"/>
                 </a:solidFill>
@@ -15434,7 +17352,7 @@
               <a:t>With storage unbounded — the standard accounting — </a:t>
             </a:r>
             <a:r>
-              <a:rPr sz="2400" b="0" i="0">
+              <a:rPr sz="2300" b="0" i="0">
                 <a:solidFill>
                   <a:srgbClr val="1A1A1A"/>
                 </a:solidFill>
@@ -15453,7 +17371,7 @@
               </a:spcAft>
             </a:pPr>
             <a:r>
-              <a:rPr sz="2400" b="0" i="0">
+              <a:rPr sz="2300" b="0" i="0">
                 <a:solidFill>
                   <a:srgbClr val="C1272D"/>
                 </a:solidFill>
@@ -15462,7 +17380,7 @@
               <a:t>•  </a:t>
             </a:r>
             <a:r>
-              <a:rPr sz="2400" b="1" i="0">
+              <a:rPr sz="2300" b="1" i="0">
                 <a:solidFill>
                   <a:srgbClr val="1A1A1A"/>
                 </a:solidFill>
@@ -15471,7 +17389,7 @@
               <a:t>With storage bounded, the decision policy is worth +8.7 answer-recall points, </a:t>
             </a:r>
             <a:r>
-              <a:rPr sz="2400" b="0" i="0">
+              <a:rPr sz="2300" b="0" i="0">
                 <a:solidFill>
                   <a:srgbClr val="1A1A1A"/>
                 </a:solidFill>
@@ -15490,7 +17408,7 @@
               </a:spcAft>
             </a:pPr>
             <a:r>
-              <a:rPr sz="2400" b="0" i="0">
+              <a:rPr sz="2300" b="0" i="0">
                 <a:solidFill>
                   <a:srgbClr val="C1272D"/>
                 </a:solidFill>
@@ -15499,7 +17417,7 @@
               <a:t>•  </a:t>
             </a:r>
             <a:r>
-              <a:rPr sz="2400" b="1" i="0">
+              <a:rPr sz="2300" b="1" i="0">
                 <a:solidFill>
                   <a:srgbClr val="1A1A1A"/>
                 </a:solidFill>
@@ -15508,7 +17426,7 @@
               <a:t>The rate–distortion crossover at which compression should pay is not reachable </a:t>
             </a:r>
             <a:r>
-              <a:rPr sz="2400" b="0" i="0">
+              <a:rPr sz="2300" b="0" i="0">
                 <a:solidFill>
                   <a:srgbClr val="1A1A1A"/>
                 </a:solidFill>
@@ -15527,7 +17445,7 @@
               </a:spcAft>
             </a:pPr>
             <a:r>
-              <a:rPr sz="2400" b="0" i="0">
+              <a:rPr sz="2300" b="0" i="0">
                 <a:solidFill>
                   <a:srgbClr val="C1272D"/>
                 </a:solidFill>
@@ -15536,7 +17454,7 @@
               <a:t>•  </a:t>
             </a:r>
             <a:r>
-              <a:rPr sz="2400" b="1" i="0">
+              <a:rPr sz="2300" b="1" i="0">
                 <a:solidFill>
                   <a:srgbClr val="1A1A1A"/>
                 </a:solidFill>
@@ -15545,7 +17463,7 @@
               <a:t>Charging for the embedding index inverts the ranking below ~40 KiB, </a:t>
             </a:r>
             <a:r>
-              <a:rPr sz="2400" b="0" i="0">
+              <a:rPr sz="2300" b="0" i="0">
                 <a:solidFill>
                   <a:srgbClr val="1A1A1A"/>
                 </a:solidFill>
@@ -15564,7 +17482,7 @@
               </a:spcAft>
             </a:pPr>
             <a:r>
-              <a:rPr sz="2400" b="0" i="0">
+              <a:rPr sz="2300" b="0" i="0">
                 <a:solidFill>
                   <a:srgbClr val="C1272D"/>
                 </a:solidFill>
@@ -15573,7 +17491,7 @@
               <a:t>•  </a:t>
             </a:r>
             <a:r>
-              <a:rPr sz="2400" b="1" i="0">
+              <a:rPr sz="2300" b="1" i="0">
                 <a:solidFill>
                   <a:srgbClr val="1A1A1A"/>
                 </a:solidFill>
@@ -15582,13 +17500,50 @@
               <a:t>An LLM judge — the obvious way to improve the scorer — loses to a regex, </a:t>
             </a:r>
             <a:r>
-              <a:rPr sz="2400" b="0" i="0">
+              <a:rPr sz="2300" b="0" i="0">
                 <a:solidFill>
                   <a:srgbClr val="1A1A1A"/>
                 </a:solidFill>
                 <a:latin typeface="Times New Roman"/>
               </a:rPr>
               <a:t>and the reason is diagnosable: it rates turns in isolation.</a:t>
+            </a:r>
+          </a:p>
+          <a:p>
+            <a:pPr>
+              <a:lnSpc>
+                <a:spcPct val="105000"/>
+              </a:lnSpc>
+              <a:spcAft>
+                <a:spcPts val="1000"/>
+              </a:spcAft>
+            </a:pPr>
+            <a:r>
+              <a:rPr sz="2300" b="0" i="0">
+                <a:solidFill>
+                  <a:srgbClr val="C1272D"/>
+                </a:solidFill>
+                <a:latin typeface="Times New Roman"/>
+              </a:rPr>
+              <a:t>•  </a:t>
+            </a:r>
+            <a:r>
+              <a:rPr sz="2300" b="1" i="0">
+                <a:solidFill>
+                  <a:srgbClr val="1A1A1A"/>
+                </a:solidFill>
+                <a:latin typeface="Times New Roman"/>
+              </a:rPr>
+              <a:t>On a second benchmark the headline does not replicate, </a:t>
+            </a:r>
+            <a:r>
+              <a:rPr sz="2300" b="0" i="0">
+                <a:solidFill>
+                  <a:srgbClr val="1A1A1A"/>
+                </a:solidFill>
+                <a:latin typeface="Times New Roman"/>
+              </a:rPr>
+              <a:t>and the cause is the scorer, not the mechanism: its separation between evidence and non-evidence turns reverses sign between corpora.</a:t>
             </a:r>
           </a:p>
         </p:txBody>
@@ -15768,7 +17723,7 @@
                 </a:solidFill>
                 <a:latin typeface="Times New Roman"/>
               </a:rPr>
-              <a:t>Presented as “a memory layer with three tiers”, this work would already have been done. Measured honestly, the more useful result is what doesn’t work.</a:t>
+              <a:t>Presented as “a memory layer with three tiers”, this work would already have been done. Measured honestly, the more useful result is what doesn’t work — including, twice now, our own headline.</a:t>
             </a:r>
           </a:p>
         </p:txBody>
@@ -15781,7 +17736,7 @@
 </p:sld>
 </file>
 
-<file path=ppt/slides/slide25.xml><?xml version="1.0" encoding="utf-8"?>
+<file path=ppt/slides/slide27.xml><?xml version="1.0" encoding="utf-8"?>
 <p:sld xmlns:a="http://schemas.openxmlformats.org/drawingml/2006/main" xmlns:p="http://schemas.openxmlformats.org/presentationml/2006/main" xmlns:r="http://schemas.openxmlformats.org/officeDocument/2006/relationships">
   <p:cSld>
     <p:spTree>
@@ -16317,7 +18272,7 @@
 </p:sld>
 </file>
 
-<file path=ppt/slides/slide26.xml><?xml version="1.0" encoding="utf-8"?>
+<file path=ppt/slides/slide28.xml><?xml version="1.0" encoding="utf-8"?>
 <p:sld xmlns:a="http://schemas.openxmlformats.org/drawingml/2006/main" xmlns:p="http://schemas.openxmlformats.org/presentationml/2006/main" xmlns:r="http://schemas.openxmlformats.org/officeDocument/2006/relationships">
   <p:cSld>
     <p:spTree>
@@ -16456,7 +18411,7 @@
 </p:sld>
 </file>
 
-<file path=ppt/slides/slide27.xml><?xml version="1.0" encoding="utf-8"?>
+<file path=ppt/slides/slide29.xml><?xml version="1.0" encoding="utf-8"?>
 <p:sld xmlns:a="http://schemas.openxmlformats.org/drawingml/2006/main" xmlns:p="http://schemas.openxmlformats.org/presentationml/2006/main" xmlns:r="http://schemas.openxmlformats.org/officeDocument/2006/relationships">
   <p:cSld>
     <p:spTree>
@@ -20146,576 +22101,6 @@
 </p:sld>
 </file>
 
-<file path=ppt/slides/slide28.xml><?xml version="1.0" encoding="utf-8"?>
-<p:sld xmlns:a="http://schemas.openxmlformats.org/drawingml/2006/main" xmlns:p="http://schemas.openxmlformats.org/presentationml/2006/main" xmlns:r="http://schemas.openxmlformats.org/officeDocument/2006/relationships">
-  <p:cSld>
-    <p:spTree>
-      <p:nvGrpSpPr>
-        <p:cNvPr id="1" name=""/>
-        <p:cNvGrpSpPr/>
-        <p:nvPr/>
-      </p:nvGrpSpPr>
-      <p:grpSpPr/>
-      <p:sp>
-        <p:nvSpPr>
-          <p:cNvPr id="2" name="TextBox 1"/>
-          <p:cNvSpPr txBox="1"/>
-          <p:nvPr/>
-        </p:nvSpPr>
-        <p:spPr>
-          <a:xfrm>
-            <a:off x="822960" y="566928"/>
-            <a:ext cx="16642080" cy="1234440"/>
-          </a:xfrm>
-          <a:prstGeom prst="rect">
-            <a:avLst/>
-          </a:prstGeom>
-          <a:noFill/>
-        </p:spPr>
-        <p:txBody>
-          <a:bodyPr wrap="square">
-            <a:spAutoFit/>
-          </a:bodyPr>
-          <a:lstStyle/>
-          <a:p>
-            <a:r>
-              <a:rPr sz="4200" b="1" i="0">
-                <a:solidFill>
-                  <a:srgbClr val="111111"/>
-                </a:solidFill>
-                <a:latin typeface="Times New Roman"/>
-              </a:rPr>
-              <a:t>Backup — repository layout</a:t>
-            </a:r>
-          </a:p>
-        </p:txBody>
-      </p:sp>
-      <p:sp>
-        <p:nvSpPr>
-          <p:cNvPr id="3" name="Rectangle 2"/>
-          <p:cNvSpPr/>
-          <p:nvPr/>
-        </p:nvSpPr>
-        <p:spPr>
-          <a:xfrm>
-            <a:off x="822960" y="1755648"/>
-            <a:ext cx="16642080" cy="19050"/>
-          </a:xfrm>
-          <a:prstGeom prst="rect">
-            <a:avLst/>
-          </a:prstGeom>
-          <a:solidFill>
-            <a:srgbClr val="C1272D"/>
-          </a:solidFill>
-          <a:ln>
-            <a:noFill/>
-          </a:ln>
-          <a:effectLst/>
-        </p:spPr>
-        <p:style>
-          <a:lnRef idx="1">
-            <a:schemeClr val="accent1"/>
-          </a:lnRef>
-          <a:fillRef idx="3">
-            <a:schemeClr val="accent1"/>
-          </a:fillRef>
-          <a:effectRef idx="2">
-            <a:schemeClr val="accent1"/>
-          </a:effectRef>
-          <a:fontRef idx="minor">
-            <a:schemeClr val="lt1"/>
-          </a:fontRef>
-        </p:style>
-        <p:txBody>
-          <a:bodyPr rtlCol="0" anchor="ctr"/>
-          <a:lstStyle/>
-          <a:p>
-            <a:pPr algn="ctr"/>
-          </a:p>
-        </p:txBody>
-      </p:sp>
-      <p:sp>
-        <p:nvSpPr>
-          <p:cNvPr id="4" name="TextBox 3"/>
-          <p:cNvSpPr txBox="1"/>
-          <p:nvPr/>
-        </p:nvSpPr>
-        <p:spPr>
-          <a:xfrm>
-            <a:off x="822960" y="2212848"/>
-            <a:ext cx="16642080" cy="6035040"/>
-          </a:xfrm>
-          <a:prstGeom prst="rect">
-            <a:avLst/>
-          </a:prstGeom>
-          <a:noFill/>
-        </p:spPr>
-        <p:txBody>
-          <a:bodyPr wrap="square">
-            <a:spAutoFit/>
-          </a:bodyPr>
-          <a:lstStyle/>
-          <a:p>
-            <a:pPr>
-              <a:lnSpc>
-                <a:spcPct val="100000"/>
-              </a:lnSpc>
-            </a:pPr>
-            <a:r>
-              <a:rPr sz="1600" b="0" i="0">
-                <a:solidFill>
-                  <a:srgbClr val="1A1A1A"/>
-                </a:solidFill>
-                <a:latin typeface="Consolas"/>
-              </a:rPr>
-              <a:t>Capstone Project/</a:t>
-            </a:r>
-          </a:p>
-          <a:p>
-            <a:pPr>
-              <a:lnSpc>
-                <a:spcPct val="100000"/>
-              </a:lnSpc>
-            </a:pPr>
-            <a:r>
-              <a:rPr sz="1600" b="0" i="0">
-                <a:solidFill>
-                  <a:srgbClr val="1A1A1A"/>
-                </a:solidFill>
-                <a:latin typeface="Consolas"/>
-              </a:rPr>
-              <a:t>  REPORT.md                       paper-ready writeup</a:t>
-            </a:r>
-          </a:p>
-          <a:p>
-            <a:pPr>
-              <a:lnSpc>
-                <a:spcPct val="100000"/>
-              </a:lnSpc>
-            </a:pPr>
-            <a:r>
-              <a:rPr sz="1600" b="0" i="0">
-                <a:solidFill>
-                  <a:srgbClr val="1A1A1A"/>
-                </a:solidFill>
-                <a:latin typeface="Consolas"/>
-              </a:rPr>
-              <a:t>  SESSION_RECORD.md               working record, §1–§28</a:t>
-            </a:r>
-          </a:p>
-          <a:p>
-            <a:pPr>
-              <a:lnSpc>
-                <a:spcPct val="100000"/>
-              </a:lnSpc>
-            </a:pPr>
-            <a:r>
-              <a:rPr sz="1600" b="0" i="0">
-                <a:solidFill>
-                  <a:srgbClr val="1A1A1A"/>
-                </a:solidFill>
-                <a:latin typeface="Consolas"/>
-              </a:rPr>
-              <a:t>  docs/</a:t>
-            </a:r>
-          </a:p>
-          <a:p>
-            <a:pPr>
-              <a:lnSpc>
-                <a:spcPct val="100000"/>
-              </a:lnSpc>
-            </a:pPr>
-            <a:r>
-              <a:rPr sz="1600" b="0" i="0">
-                <a:solidFill>
-                  <a:srgbClr val="1A1A1A"/>
-                </a:solidFill>
-                <a:latin typeface="Consolas"/>
-              </a:rPr>
-              <a:t>    REVIEW2_PROGRESS_REPORT.md    the progress report for this review</a:t>
-            </a:r>
-          </a:p>
-          <a:p>
-            <a:pPr>
-              <a:lnSpc>
-                <a:spcPct val="100000"/>
-              </a:lnSpc>
-            </a:pPr>
-            <a:r>
-              <a:rPr sz="1600" b="0" i="0">
-                <a:solidFill>
-                  <a:srgbClr val="5A5A5A"/>
-                </a:solidFill>
-                <a:latin typeface="Consolas"/>
-              </a:rPr>
-              <a:t>    make_review2_deck.py          builds this deck from the CSVs</a:t>
-            </a:r>
-          </a:p>
-          <a:p>
-            <a:pPr>
-              <a:lnSpc>
-                <a:spcPct val="100000"/>
-              </a:lnSpc>
-            </a:pPr>
-            <a:r>
-              <a:rPr sz="1600" b="0" i="0">
-                <a:solidFill>
-                  <a:srgbClr val="1A1A1A"/>
-                </a:solidFill>
-                <a:latin typeface="Consolas"/>
-              </a:rPr>
-              <a:t>  frontend/</a:t>
-            </a:r>
-          </a:p>
-          <a:p>
-            <a:pPr>
-              <a:lnSpc>
-                <a:spcPct val="100000"/>
-              </a:lnSpc>
-            </a:pPr>
-            <a:r>
-              <a:rPr sz="1600" b="0" i="0">
-                <a:solidFill>
-                  <a:srgbClr val="1A1A1A"/>
-                </a:solidFill>
-                <a:latin typeface="Consolas"/>
-              </a:rPr>
-              <a:t>    index.html                    interactive results dashboard</a:t>
-            </a:r>
-          </a:p>
-          <a:p>
-            <a:pPr>
-              <a:lnSpc>
-                <a:spcPct val="100000"/>
-              </a:lnSpc>
-            </a:pPr>
-            <a:r>
-              <a:rPr sz="1600" b="0" i="0">
-                <a:solidFill>
-                  <a:srgbClr val="1A1A1A"/>
-                </a:solidFill>
-                <a:latin typeface="Consolas"/>
-              </a:rPr>
-              <a:t>    build_data.py                 regenerates data.js from results/*.csv</a:t>
-            </a:r>
-          </a:p>
-          <a:p>
-            <a:pPr>
-              <a:lnSpc>
-                <a:spcPct val="100000"/>
-              </a:lnSpc>
-            </a:pPr>
-            <a:r>
-              <a:rPr sz="1600" b="0" i="0">
-                <a:solidFill>
-                  <a:srgbClr val="1A1A1A"/>
-                </a:solidFill>
-                <a:latin typeface="Consolas"/>
-              </a:rPr>
-              <a:t>  memgate/</a:t>
-            </a:r>
-          </a:p>
-          <a:p>
-            <a:pPr>
-              <a:lnSpc>
-                <a:spcPct val="100000"/>
-              </a:lnSpc>
-            </a:pPr>
-            <a:r>
-              <a:rPr sz="1600" b="0" i="0">
-                <a:solidFill>
-                  <a:srgbClr val="1A1A1A"/>
-                </a:solidFill>
-                <a:latin typeface="Consolas"/>
-              </a:rPr>
-              <a:t>    memgate/                      the library — types, utils, store, scoring,</a:t>
-            </a:r>
-          </a:p>
-          <a:p>
-            <a:pPr>
-              <a:lnSpc>
-                <a:spcPct val="100000"/>
-              </a:lnSpc>
-            </a:pPr>
-            <a:r>
-              <a:rPr sz="1600" b="0" i="0">
-                <a:solidFill>
-                  <a:srgbClr val="1A1A1A"/>
-                </a:solidFill>
-                <a:latin typeface="Consolas"/>
-              </a:rPr>
-              <a:t>                                  policies, compress, judge, llm_judge, data, harness</a:t>
-            </a:r>
-          </a:p>
-          <a:p>
-            <a:pPr>
-              <a:lnSpc>
-                <a:spcPct val="100000"/>
-              </a:lnSpc>
-            </a:pPr>
-            <a:r>
-              <a:rPr sz="1600" b="0" i="0">
-                <a:solidFill>
-                  <a:srgbClr val="5A5A5A"/>
-                </a:solidFill>
-                <a:latin typeface="Consolas"/>
-              </a:rPr>
-              <a:t>    run_locomo.py                 context-budget frontier</a:t>
-            </a:r>
-          </a:p>
-          <a:p>
-            <a:pPr>
-              <a:lnSpc>
-                <a:spcPct val="100000"/>
-              </a:lnSpc>
-            </a:pPr>
-            <a:r>
-              <a:rPr sz="1600" b="0" i="0">
-                <a:solidFill>
-                  <a:srgbClr val="5A5A5A"/>
-                </a:solidFill>
-                <a:latin typeface="Consolas"/>
-              </a:rPr>
-              <a:t>    run_storage_sweep.py          storage budget — 35 configurations</a:t>
-            </a:r>
-          </a:p>
-          <a:p>
-            <a:pPr>
-              <a:lnSpc>
-                <a:spcPct val="100000"/>
-              </a:lnSpc>
-            </a:pPr>
-            <a:r>
-              <a:rPr sz="1600" b="0" i="0">
-                <a:solidFill>
-                  <a:srgbClr val="5A5A5A"/>
-                </a:solidFill>
-                <a:latin typeface="Consolas"/>
-              </a:rPr>
-              <a:t>    run_scaling.py                compression ratio to 182×</a:t>
-            </a:r>
-          </a:p>
-          <a:p>
-            <a:pPr>
-              <a:lnSpc>
-                <a:spcPct val="100000"/>
-              </a:lnSpc>
-            </a:pPr>
-            <a:r>
-              <a:rPr sz="1600" b="0" i="0">
-                <a:solidFill>
-                  <a:srgbClr val="5A5A5A"/>
-                </a:solidFill>
-                <a:latin typeface="Consolas"/>
-              </a:rPr>
-              <a:t>    run_cost_model.py             byte accounting</a:t>
-            </a:r>
-          </a:p>
-          <a:p>
-            <a:pPr>
-              <a:lnSpc>
-                <a:spcPct val="100000"/>
-              </a:lnSpc>
-            </a:pPr>
-            <a:r>
-              <a:rPr sz="1600" b="0" i="0">
-                <a:solidFill>
-                  <a:srgbClr val="5A5A5A"/>
-                </a:solidFill>
-                <a:latin typeface="Consolas"/>
-              </a:rPr>
-              <a:t>    run_significance.py           bootstrap + McNemar</a:t>
-            </a:r>
-          </a:p>
-          <a:p>
-            <a:pPr>
-              <a:lnSpc>
-                <a:spcPct val="100000"/>
-              </a:lnSpc>
-            </a:pPr>
-            <a:r>
-              <a:rPr sz="1600" b="0" i="0">
-                <a:solidFill>
-                  <a:srgbClr val="1A1A1A"/>
-                </a:solidFill>
-                <a:latin typeface="Consolas"/>
-              </a:rPr>
-              <a:t>    train_scorer.py               learned scorer, leave-one-conversation-out</a:t>
-            </a:r>
-          </a:p>
-          <a:p>
-            <a:pPr>
-              <a:lnSpc>
-                <a:spcPct val="100000"/>
-              </a:lnSpc>
-            </a:pPr>
-            <a:r>
-              <a:rPr sz="1600" b="0" i="0">
-                <a:solidFill>
-                  <a:srgbClr val="1A1A1A"/>
-                </a:solidFill>
-                <a:latin typeface="Consolas"/>
-              </a:rPr>
-              <a:t>    precompute_judge.py           P2 judge scores (cached)</a:t>
-            </a:r>
-          </a:p>
-          <a:p>
-            <a:pPr>
-              <a:lnSpc>
-                <a:spcPct val="100000"/>
-              </a:lnSpc>
-            </a:pPr>
-            <a:r>
-              <a:rPr sz="1600" b="0" i="0">
-                <a:solidFill>
-                  <a:srgbClr val="5A5A5A"/>
-                </a:solidFill>
-                <a:latin typeface="Consolas"/>
-              </a:rPr>
-              <a:t>    run_judge_eval.py             scorer comparison with clustered CIs</a:t>
-            </a:r>
-          </a:p>
-          <a:p>
-            <a:pPr>
-              <a:lnSpc>
-                <a:spcPct val="100000"/>
-              </a:lnSpc>
-            </a:pPr>
-            <a:r>
-              <a:rPr sz="1600" b="0" i="0">
-                <a:solidFill>
-                  <a:srgbClr val="5A5A5A"/>
-                </a:solidFill>
-                <a:latin typeface="Consolas"/>
-              </a:rPr>
-              <a:t>    run_endtask.py                end-task accuracy (resumable)</a:t>
-            </a:r>
-          </a:p>
-          <a:p>
-            <a:pPr>
-              <a:lnSpc>
-                <a:spcPct val="100000"/>
-              </a:lnSpc>
-            </a:pPr>
-            <a:r>
-              <a:rPr sz="1600" b="0" i="0">
-                <a:solidFill>
-                  <a:srgbClr val="5A5A5A"/>
-                </a:solidFill>
-                <a:latin typeface="Consolas"/>
-              </a:rPr>
-              <a:t>    run_ablations.py              23-configuration component attribution</a:t>
-            </a:r>
-          </a:p>
-          <a:p>
-            <a:pPr>
-              <a:lnSpc>
-                <a:spcPct val="100000"/>
-              </a:lnSpc>
-            </a:pPr>
-            <a:r>
-              <a:rPr sz="1600" b="0" i="0">
-                <a:solidFill>
-                  <a:srgbClr val="5A5A5A"/>
-                </a:solidFill>
-                <a:latin typeface="Consolas"/>
-              </a:rPr>
-              <a:t>    diagnose.py                   attributes every miss to one component</a:t>
-            </a:r>
-          </a:p>
-          <a:p>
-            <a:pPr>
-              <a:lnSpc>
-                <a:spcPct val="100000"/>
-              </a:lnSpc>
-            </a:pPr>
-            <a:r>
-              <a:rPr sz="1600" b="0" i="0">
-                <a:solidFill>
-                  <a:srgbClr val="5A5A5A"/>
-                </a:solidFill>
-                <a:latin typeface="Consolas"/>
-              </a:rPr>
-              <a:t>    make_figures.py               fig1–fig5</a:t>
-            </a:r>
-          </a:p>
-          <a:p>
-            <a:pPr>
-              <a:lnSpc>
-                <a:spcPct val="100000"/>
-              </a:lnSpc>
-            </a:pPr>
-            <a:r>
-              <a:rPr sz="1600" b="0" i="0">
-                <a:solidFill>
-                  <a:srgbClr val="5A5A5A"/>
-                </a:solidFill>
-                <a:latin typeface="Consolas"/>
-              </a:rPr>
-              <a:t>    test_memgate.py               61 tests</a:t>
-            </a:r>
-          </a:p>
-          <a:p>
-            <a:pPr>
-              <a:lnSpc>
-                <a:spcPct val="100000"/>
-              </a:lnSpc>
-            </a:pPr>
-            <a:r>
-              <a:rPr sz="1600" b="0" i="0">
-                <a:solidFill>
-                  <a:srgbClr val="1A1A1A"/>
-                </a:solidFill>
-                <a:latin typeface="Consolas"/>
-              </a:rPr>
-              <a:t>    results/                      every CSV and figure quoted in this deck</a:t>
-            </a:r>
-          </a:p>
-        </p:txBody>
-      </p:sp>
-      <p:sp>
-        <p:nvSpPr>
-          <p:cNvPr id="5" name="TextBox 4"/>
-          <p:cNvSpPr txBox="1"/>
-          <p:nvPr/>
-        </p:nvSpPr>
-        <p:spPr>
-          <a:xfrm>
-            <a:off x="822960" y="8915400"/>
-            <a:ext cx="16642080" cy="692658"/>
-          </a:xfrm>
-          <a:prstGeom prst="rect">
-            <a:avLst/>
-          </a:prstGeom>
-          <a:noFill/>
-        </p:spPr>
-        <p:txBody>
-          <a:bodyPr wrap="square">
-            <a:spAutoFit/>
-          </a:bodyPr>
-          <a:lstStyle/>
-          <a:p>
-            <a:pPr algn="l"/>
-            <a:r>
-              <a:rPr sz="1700" b="0" i="1">
-                <a:solidFill>
-                  <a:srgbClr val="5A5A5A"/>
-                </a:solidFill>
-                <a:latin typeface="Times New Roman"/>
-              </a:rPr>
-              <a:t>Not committed, by design: the LoCoMo benchmark (2.7 MB) and the model weights (~1 GB). Both are reproducible — memgate/README.md gives the exact fetch commands. The results CSVs are committed, so every number here is checkable without a nine-minute benchmark run.</a:t>
-            </a:r>
-          </a:p>
-        </p:txBody>
-      </p:sp>
-    </p:spTree>
-  </p:cSld>
-  <p:clrMapOvr>
-    <a:masterClrMapping/>
-  </p:clrMapOvr>
-</p:sld>
-</file>
-
 <file path=ppt/slides/slide3.xml><?xml version="1.0" encoding="utf-8"?>
 <p:sld xmlns:a="http://schemas.openxmlformats.org/drawingml/2006/main" xmlns:p="http://schemas.openxmlformats.org/presentationml/2006/main" xmlns:r="http://schemas.openxmlformats.org/officeDocument/2006/relationships">
   <p:cSld>
@@ -21362,6 +22747,608 @@
                 <a:latin typeface="Times New Roman"/>
               </a:rPr>
               <a:t>A withdrawn result the students raise is worth more than one the panel discovers.</a:t>
+            </a:r>
+          </a:p>
+        </p:txBody>
+      </p:sp>
+    </p:spTree>
+  </p:cSld>
+  <p:clrMapOvr>
+    <a:masterClrMapping/>
+  </p:clrMapOvr>
+</p:sld>
+</file>
+
+<file path=ppt/slides/slide30.xml><?xml version="1.0" encoding="utf-8"?>
+<p:sld xmlns:a="http://schemas.openxmlformats.org/drawingml/2006/main" xmlns:p="http://schemas.openxmlformats.org/presentationml/2006/main" xmlns:r="http://schemas.openxmlformats.org/officeDocument/2006/relationships">
+  <p:cSld>
+    <p:spTree>
+      <p:nvGrpSpPr>
+        <p:cNvPr id="1" name=""/>
+        <p:cNvGrpSpPr/>
+        <p:nvPr/>
+      </p:nvGrpSpPr>
+      <p:grpSpPr/>
+      <p:sp>
+        <p:nvSpPr>
+          <p:cNvPr id="2" name="TextBox 1"/>
+          <p:cNvSpPr txBox="1"/>
+          <p:nvPr/>
+        </p:nvSpPr>
+        <p:spPr>
+          <a:xfrm>
+            <a:off x="822960" y="566928"/>
+            <a:ext cx="16642080" cy="1234440"/>
+          </a:xfrm>
+          <a:prstGeom prst="rect">
+            <a:avLst/>
+          </a:prstGeom>
+          <a:noFill/>
+        </p:spPr>
+        <p:txBody>
+          <a:bodyPr wrap="square">
+            <a:spAutoFit/>
+          </a:bodyPr>
+          <a:lstStyle/>
+          <a:p>
+            <a:r>
+              <a:rPr sz="4200" b="1" i="0">
+                <a:solidFill>
+                  <a:srgbClr val="111111"/>
+                </a:solidFill>
+                <a:latin typeface="Times New Roman"/>
+              </a:rPr>
+              <a:t>Backup — repository layout</a:t>
+            </a:r>
+          </a:p>
+        </p:txBody>
+      </p:sp>
+      <p:sp>
+        <p:nvSpPr>
+          <p:cNvPr id="3" name="Rectangle 2"/>
+          <p:cNvSpPr/>
+          <p:nvPr/>
+        </p:nvSpPr>
+        <p:spPr>
+          <a:xfrm>
+            <a:off x="822960" y="1755648"/>
+            <a:ext cx="16642080" cy="19050"/>
+          </a:xfrm>
+          <a:prstGeom prst="rect">
+            <a:avLst/>
+          </a:prstGeom>
+          <a:solidFill>
+            <a:srgbClr val="C1272D"/>
+          </a:solidFill>
+          <a:ln>
+            <a:noFill/>
+          </a:ln>
+          <a:effectLst/>
+        </p:spPr>
+        <p:style>
+          <a:lnRef idx="1">
+            <a:schemeClr val="accent1"/>
+          </a:lnRef>
+          <a:fillRef idx="3">
+            <a:schemeClr val="accent1"/>
+          </a:fillRef>
+          <a:effectRef idx="2">
+            <a:schemeClr val="accent1"/>
+          </a:effectRef>
+          <a:fontRef idx="minor">
+            <a:schemeClr val="lt1"/>
+          </a:fontRef>
+        </p:style>
+        <p:txBody>
+          <a:bodyPr rtlCol="0" anchor="ctr"/>
+          <a:lstStyle/>
+          <a:p>
+            <a:pPr algn="ctr"/>
+          </a:p>
+        </p:txBody>
+      </p:sp>
+      <p:sp>
+        <p:nvSpPr>
+          <p:cNvPr id="4" name="TextBox 3"/>
+          <p:cNvSpPr txBox="1"/>
+          <p:nvPr/>
+        </p:nvSpPr>
+        <p:spPr>
+          <a:xfrm>
+            <a:off x="822960" y="2212848"/>
+            <a:ext cx="16642080" cy="6035040"/>
+          </a:xfrm>
+          <a:prstGeom prst="rect">
+            <a:avLst/>
+          </a:prstGeom>
+          <a:noFill/>
+        </p:spPr>
+        <p:txBody>
+          <a:bodyPr wrap="square">
+            <a:spAutoFit/>
+          </a:bodyPr>
+          <a:lstStyle/>
+          <a:p>
+            <a:pPr>
+              <a:lnSpc>
+                <a:spcPct val="100000"/>
+              </a:lnSpc>
+            </a:pPr>
+            <a:r>
+              <a:rPr sz="1600" b="0" i="0">
+                <a:solidFill>
+                  <a:srgbClr val="1A1A1A"/>
+                </a:solidFill>
+                <a:latin typeface="Consolas"/>
+              </a:rPr>
+              <a:t>Capstone Project/</a:t>
+            </a:r>
+          </a:p>
+          <a:p>
+            <a:pPr>
+              <a:lnSpc>
+                <a:spcPct val="100000"/>
+              </a:lnSpc>
+            </a:pPr>
+            <a:r>
+              <a:rPr sz="1600" b="0" i="0">
+                <a:solidFill>
+                  <a:srgbClr val="1A1A1A"/>
+                </a:solidFill>
+                <a:latin typeface="Consolas"/>
+              </a:rPr>
+              <a:t>  REPORT.md                       paper-ready writeup</a:t>
+            </a:r>
+          </a:p>
+          <a:p>
+            <a:pPr>
+              <a:lnSpc>
+                <a:spcPct val="100000"/>
+              </a:lnSpc>
+            </a:pPr>
+            <a:r>
+              <a:rPr sz="1600" b="0" i="0">
+                <a:solidFill>
+                  <a:srgbClr val="1A1A1A"/>
+                </a:solidFill>
+                <a:latin typeface="Consolas"/>
+              </a:rPr>
+              <a:t>  SESSION_RECORD.md               working record, §1–§28</a:t>
+            </a:r>
+          </a:p>
+          <a:p>
+            <a:pPr>
+              <a:lnSpc>
+                <a:spcPct val="100000"/>
+              </a:lnSpc>
+            </a:pPr>
+            <a:r>
+              <a:rPr sz="1600" b="0" i="0">
+                <a:solidFill>
+                  <a:srgbClr val="1A1A1A"/>
+                </a:solidFill>
+                <a:latin typeface="Consolas"/>
+              </a:rPr>
+              <a:t>  docs/</a:t>
+            </a:r>
+          </a:p>
+          <a:p>
+            <a:pPr>
+              <a:lnSpc>
+                <a:spcPct val="100000"/>
+              </a:lnSpc>
+            </a:pPr>
+            <a:r>
+              <a:rPr sz="1600" b="0" i="0">
+                <a:solidFill>
+                  <a:srgbClr val="1A1A1A"/>
+                </a:solidFill>
+                <a:latin typeface="Consolas"/>
+              </a:rPr>
+              <a:t>    REVIEW2_PROGRESS_REPORT.md    the progress report for this review</a:t>
+            </a:r>
+          </a:p>
+          <a:p>
+            <a:pPr>
+              <a:lnSpc>
+                <a:spcPct val="100000"/>
+              </a:lnSpc>
+            </a:pPr>
+            <a:r>
+              <a:rPr sz="1600" b="0" i="0">
+                <a:solidFill>
+                  <a:srgbClr val="5A5A5A"/>
+                </a:solidFill>
+                <a:latin typeface="Consolas"/>
+              </a:rPr>
+              <a:t>    make_review2_deck.py          builds this deck from the CSVs</a:t>
+            </a:r>
+          </a:p>
+          <a:p>
+            <a:pPr>
+              <a:lnSpc>
+                <a:spcPct val="100000"/>
+              </a:lnSpc>
+            </a:pPr>
+            <a:r>
+              <a:rPr sz="1600" b="0" i="0">
+                <a:solidFill>
+                  <a:srgbClr val="1A1A1A"/>
+                </a:solidFill>
+                <a:latin typeface="Consolas"/>
+              </a:rPr>
+              <a:t>  frontend/</a:t>
+            </a:r>
+          </a:p>
+          <a:p>
+            <a:pPr>
+              <a:lnSpc>
+                <a:spcPct val="100000"/>
+              </a:lnSpc>
+            </a:pPr>
+            <a:r>
+              <a:rPr sz="1600" b="0" i="0">
+                <a:solidFill>
+                  <a:srgbClr val="1A1A1A"/>
+                </a:solidFill>
+                <a:latin typeface="Consolas"/>
+              </a:rPr>
+              <a:t>    index.html                    interactive results dashboard</a:t>
+            </a:r>
+          </a:p>
+          <a:p>
+            <a:pPr>
+              <a:lnSpc>
+                <a:spcPct val="100000"/>
+              </a:lnSpc>
+            </a:pPr>
+            <a:r>
+              <a:rPr sz="1600" b="0" i="0">
+                <a:solidFill>
+                  <a:srgbClr val="1A1A1A"/>
+                </a:solidFill>
+                <a:latin typeface="Consolas"/>
+              </a:rPr>
+              <a:t>    build_data.py                 regenerates data.js from results/*.csv</a:t>
+            </a:r>
+          </a:p>
+          <a:p>
+            <a:pPr>
+              <a:lnSpc>
+                <a:spcPct val="100000"/>
+              </a:lnSpc>
+            </a:pPr>
+            <a:r>
+              <a:rPr sz="1600" b="0" i="0">
+                <a:solidFill>
+                  <a:srgbClr val="1A1A1A"/>
+                </a:solidFill>
+                <a:latin typeface="Consolas"/>
+              </a:rPr>
+              <a:t>  memgate/</a:t>
+            </a:r>
+          </a:p>
+          <a:p>
+            <a:pPr>
+              <a:lnSpc>
+                <a:spcPct val="100000"/>
+              </a:lnSpc>
+            </a:pPr>
+            <a:r>
+              <a:rPr sz="1600" b="0" i="0">
+                <a:solidFill>
+                  <a:srgbClr val="1A1A1A"/>
+                </a:solidFill>
+                <a:latin typeface="Consolas"/>
+              </a:rPr>
+              <a:t>    memgate/                      the library — types, utils, store, scoring,</a:t>
+            </a:r>
+          </a:p>
+          <a:p>
+            <a:pPr>
+              <a:lnSpc>
+                <a:spcPct val="100000"/>
+              </a:lnSpc>
+            </a:pPr>
+            <a:r>
+              <a:rPr sz="1600" b="0" i="0">
+                <a:solidFill>
+                  <a:srgbClr val="1A1A1A"/>
+                </a:solidFill>
+                <a:latin typeface="Consolas"/>
+              </a:rPr>
+              <a:t>                                  policies, compress, judge, llm_judge, data, harness</a:t>
+            </a:r>
+          </a:p>
+          <a:p>
+            <a:pPr>
+              <a:lnSpc>
+                <a:spcPct val="100000"/>
+              </a:lnSpc>
+            </a:pPr>
+            <a:r>
+              <a:rPr sz="1600" b="0" i="0">
+                <a:solidFill>
+                  <a:srgbClr val="5A5A5A"/>
+                </a:solidFill>
+                <a:latin typeface="Consolas"/>
+              </a:rPr>
+              <a:t>    run_locomo.py                 context-budget frontier</a:t>
+            </a:r>
+          </a:p>
+          <a:p>
+            <a:pPr>
+              <a:lnSpc>
+                <a:spcPct val="100000"/>
+              </a:lnSpc>
+            </a:pPr>
+            <a:r>
+              <a:rPr sz="1600" b="0" i="0">
+                <a:solidFill>
+                  <a:srgbClr val="5A5A5A"/>
+                </a:solidFill>
+                <a:latin typeface="Consolas"/>
+              </a:rPr>
+              <a:t>    run_storage_sweep.py          storage budget — 35 configurations</a:t>
+            </a:r>
+          </a:p>
+          <a:p>
+            <a:pPr>
+              <a:lnSpc>
+                <a:spcPct val="100000"/>
+              </a:lnSpc>
+            </a:pPr>
+            <a:r>
+              <a:rPr sz="1600" b="0" i="0">
+                <a:solidFill>
+                  <a:srgbClr val="5A5A5A"/>
+                </a:solidFill>
+                <a:latin typeface="Consolas"/>
+              </a:rPr>
+              <a:t>    run_scaling.py                compression ratio to 182×</a:t>
+            </a:r>
+          </a:p>
+          <a:p>
+            <a:pPr>
+              <a:lnSpc>
+                <a:spcPct val="100000"/>
+              </a:lnSpc>
+            </a:pPr>
+            <a:r>
+              <a:rPr sz="1600" b="0" i="0">
+                <a:solidFill>
+                  <a:srgbClr val="5A5A5A"/>
+                </a:solidFill>
+                <a:latin typeface="Consolas"/>
+              </a:rPr>
+              <a:t>    run_cost_model.py             byte accounting</a:t>
+            </a:r>
+          </a:p>
+          <a:p>
+            <a:pPr>
+              <a:lnSpc>
+                <a:spcPct val="100000"/>
+              </a:lnSpc>
+            </a:pPr>
+            <a:r>
+              <a:rPr sz="1600" b="0" i="0">
+                <a:solidFill>
+                  <a:srgbClr val="5A5A5A"/>
+                </a:solidFill>
+                <a:latin typeface="Consolas"/>
+              </a:rPr>
+              <a:t>    run_significance.py           bootstrap + McNemar</a:t>
+            </a:r>
+          </a:p>
+          <a:p>
+            <a:pPr>
+              <a:lnSpc>
+                <a:spcPct val="100000"/>
+              </a:lnSpc>
+            </a:pPr>
+            <a:r>
+              <a:rPr sz="1600" b="0" i="0">
+                <a:solidFill>
+                  <a:srgbClr val="1A1A1A"/>
+                </a:solidFill>
+                <a:latin typeface="Consolas"/>
+              </a:rPr>
+              <a:t>    train_scorer.py               learned scorer, leave-one-conversation-out</a:t>
+            </a:r>
+          </a:p>
+          <a:p>
+            <a:pPr>
+              <a:lnSpc>
+                <a:spcPct val="100000"/>
+              </a:lnSpc>
+            </a:pPr>
+            <a:r>
+              <a:rPr sz="1600" b="0" i="0">
+                <a:solidFill>
+                  <a:srgbClr val="1A1A1A"/>
+                </a:solidFill>
+                <a:latin typeface="Consolas"/>
+              </a:rPr>
+              <a:t>    precompute_judge.py           P2 judge scores (cached)</a:t>
+            </a:r>
+          </a:p>
+          <a:p>
+            <a:pPr>
+              <a:lnSpc>
+                <a:spcPct val="100000"/>
+              </a:lnSpc>
+            </a:pPr>
+            <a:r>
+              <a:rPr sz="1600" b="0" i="0">
+                <a:solidFill>
+                  <a:srgbClr val="5A5A5A"/>
+                </a:solidFill>
+                <a:latin typeface="Consolas"/>
+              </a:rPr>
+              <a:t>    run_judge_eval.py             scorer comparison with clustered CIs</a:t>
+            </a:r>
+          </a:p>
+          <a:p>
+            <a:pPr>
+              <a:lnSpc>
+                <a:spcPct val="100000"/>
+              </a:lnSpc>
+            </a:pPr>
+            <a:r>
+              <a:rPr sz="1600" b="0" i="0">
+                <a:solidFill>
+                  <a:srgbClr val="5A5A5A"/>
+                </a:solidFill>
+                <a:latin typeface="Consolas"/>
+              </a:rPr>
+              <a:t>    run_endtask.py                end-task accuracy (resumable)</a:t>
+            </a:r>
+          </a:p>
+          <a:p>
+            <a:pPr>
+              <a:lnSpc>
+                <a:spcPct val="100000"/>
+              </a:lnSpc>
+            </a:pPr>
+            <a:r>
+              <a:rPr sz="1600" b="0" i="0">
+                <a:solidFill>
+                  <a:srgbClr val="5A5A5A"/>
+                </a:solidFill>
+                <a:latin typeface="Consolas"/>
+              </a:rPr>
+              <a:t>    run_ablations.py              23-configuration component attribution</a:t>
+            </a:r>
+          </a:p>
+          <a:p>
+            <a:pPr>
+              <a:lnSpc>
+                <a:spcPct val="100000"/>
+              </a:lnSpc>
+            </a:pPr>
+            <a:r>
+              <a:rPr sz="1600" b="0" i="0">
+                <a:solidFill>
+                  <a:srgbClr val="5A5A5A"/>
+                </a:solidFill>
+                <a:latin typeface="Consolas"/>
+              </a:rPr>
+              <a:t>    diagnose.py                   attributes every miss to one component</a:t>
+            </a:r>
+          </a:p>
+          <a:p>
+            <a:pPr>
+              <a:lnSpc>
+                <a:spcPct val="100000"/>
+              </a:lnSpc>
+            </a:pPr>
+            <a:r>
+              <a:rPr sz="1600" b="0" i="0">
+                <a:solidFill>
+                  <a:srgbClr val="5A5A5A"/>
+                </a:solidFill>
+                <a:latin typeface="Consolas"/>
+              </a:rPr>
+              <a:t>    make_figures.py               fig1–fig5</a:t>
+            </a:r>
+          </a:p>
+          <a:p>
+            <a:pPr>
+              <a:lnSpc>
+                <a:spcPct val="100000"/>
+              </a:lnSpc>
+            </a:pPr>
+            <a:r>
+              <a:rPr sz="1600" b="0" i="0">
+                <a:solidFill>
+                  <a:srgbClr val="5A5A5A"/>
+                </a:solidFill>
+                <a:latin typeface="Consolas"/>
+              </a:rPr>
+              <a:t>    run_longmemeval.py            LongMemEval, swept by store budget</a:t>
+            </a:r>
+          </a:p>
+          <a:p>
+            <a:pPr>
+              <a:lnSpc>
+                <a:spcPct val="100000"/>
+              </a:lnSpc>
+            </a:pPr>
+            <a:r>
+              <a:rPr sz="1600" b="0" i="0">
+                <a:solidFill>
+                  <a:srgbClr val="5A5A5A"/>
+                </a:solidFill>
+                <a:latin typeface="Consolas"/>
+              </a:rPr>
+              <a:t>    run_lme_split.py              the §30.4 recency-confound control</a:t>
+            </a:r>
+          </a:p>
+          <a:p>
+            <a:pPr>
+              <a:lnSpc>
+                <a:spcPct val="100000"/>
+              </a:lnSpc>
+            </a:pPr>
+            <a:r>
+              <a:rPr sz="1600" b="0" i="0">
+                <a:solidFill>
+                  <a:srgbClr val="5A5A5A"/>
+                </a:solidFill>
+                <a:latin typeface="Consolas"/>
+              </a:rPr>
+              <a:t>    test_memgate.py               68 tests</a:t>
+            </a:r>
+          </a:p>
+          <a:p>
+            <a:pPr>
+              <a:lnSpc>
+                <a:spcPct val="100000"/>
+              </a:lnSpc>
+            </a:pPr>
+            <a:r>
+              <a:rPr sz="1600" b="0" i="0">
+                <a:solidFill>
+                  <a:srgbClr val="1A1A1A"/>
+                </a:solidFill>
+                <a:latin typeface="Consolas"/>
+              </a:rPr>
+              <a:t>    results/                      every CSV and figure quoted in this deck</a:t>
+            </a:r>
+          </a:p>
+        </p:txBody>
+      </p:sp>
+      <p:sp>
+        <p:nvSpPr>
+          <p:cNvPr id="5" name="TextBox 4"/>
+          <p:cNvSpPr txBox="1"/>
+          <p:nvPr/>
+        </p:nvSpPr>
+        <p:spPr>
+          <a:xfrm>
+            <a:off x="822960" y="8915400"/>
+            <a:ext cx="16642080" cy="692658"/>
+          </a:xfrm>
+          <a:prstGeom prst="rect">
+            <a:avLst/>
+          </a:prstGeom>
+          <a:noFill/>
+        </p:spPr>
+        <p:txBody>
+          <a:bodyPr wrap="square">
+            <a:spAutoFit/>
+          </a:bodyPr>
+          <a:lstStyle/>
+          <a:p>
+            <a:pPr algn="l"/>
+            <a:r>
+              <a:rPr sz="1700" b="0" i="1">
+                <a:solidFill>
+                  <a:srgbClr val="5A5A5A"/>
+                </a:solidFill>
+                <a:latin typeface="Times New Roman"/>
+              </a:rPr>
+              <a:t>Not committed, by design: the LoCoMo benchmark (2.7 MB) and the model weights (~1 GB). Both are reproducible — memgate/README.md gives the exact fetch commands. The results CSVs are committed, so every number here is checkable without a nine-minute benchmark run.</a:t>
             </a:r>
           </a:p>
         </p:txBody>
